--- a/day-3-copilot-in-excel/day-3-copilot.pptx
+++ b/day-3-copilot-in-excel/day-3-copilot.pptx
@@ -5,21 +5,20 @@
     <p:sldMasterId id="2147483648" r:id="rId1"/>
   </p:sldMasterIdLst>
   <p:notesMasterIdLst>
-    <p:notesMasterId r:id="rId10"/>
+    <p:notesMasterId r:id="rId13"/>
   </p:notesMasterIdLst>
   <p:sldIdLst>
     <p:sldId id="256" r:id="rId2"/>
     <p:sldId id="475" r:id="rId3"/>
     <p:sldId id="471" r:id="rId4"/>
-    <p:sldId id="476" r:id="rId18"/>
-    <p:sldId id="477" r:id="rId19"/>
-    <p:sldId id="478" r:id="rId20"/>
-    <p:sldId id="481" r:id="rId23"/>
-    <p:sldId id="484" r:id="rId26"/>
-    <p:sldId id="474" r:id="rId6"/>
-    <p:sldId id="473" r:id="rId7"/>
-    <p:sldId id="415" r:id="rId8"/>
-    <p:sldId id="470" r:id="rId9"/>
+    <p:sldId id="476" r:id="rId5"/>
+    <p:sldId id="478" r:id="rId6"/>
+    <p:sldId id="481" r:id="rId7"/>
+    <p:sldId id="484" r:id="rId8"/>
+    <p:sldId id="474" r:id="rId9"/>
+    <p:sldId id="473" r:id="rId10"/>
+    <p:sldId id="415" r:id="rId11"/>
+    <p:sldId id="470" r:id="rId12"/>
   </p:sldIdLst>
   <p:sldSz cx="18288000" cy="10287000"/>
   <p:notesSz cx="6858000" cy="9144000"/>
@@ -246,7 +245,7 @@
           <a:p>
             <a:fld id="{17A98A70-FA8C-4354-959C-C70678AC9BCF}" type="datetimeFigureOut">
               <a:rPr lang="en-US" smtClean="0"/>
-              <a:t>4/8/2026</a:t>
+              <a:t>4/16/2026</a:t>
             </a:fld>
             <a:endParaRPr lang="en-US"/>
           </a:p>
@@ -583,8 +582,8 @@
 </p:notes>
 </file>
 
-<file path=ppt/notesSlides/notesSlide12.xml><?xml version="1.0" encoding="utf-8"?>
-<p:notes xmlns:a="http://schemas.openxmlformats.org/drawingml/2006/main" xmlns:p="http://schemas.openxmlformats.org/presentationml/2006/main" xmlns:r="http://schemas.openxmlformats.org/officeDocument/2006/relationships">
+<file path=ppt/notesSlides/notesSlide10.xml><?xml version="1.0" encoding="utf-8"?>
+<p:notes xmlns:a="http://schemas.openxmlformats.org/drawingml/2006/main" xmlns:r="http://schemas.openxmlformats.org/officeDocument/2006/relationships" xmlns:p="http://schemas.openxmlformats.org/presentationml/2006/main">
   <p:cSld>
     <p:spTree>
       <p:nvGrpSpPr>
@@ -604,7 +603,7 @@
         <p:nvSpPr>
           <p:cNvPr id="2" name="Slide Image Placeholder 1"/>
           <p:cNvSpPr>
-            <a:spLocks noGrp="1"/>
+            <a:spLocks noGrp="1" noRot="1" noChangeAspect="1"/>
           </p:cNvSpPr>
           <p:nvPr>
             <p:ph type="sldImg" idx="2"/>
@@ -619,7 +618,7 @@
             <a:spLocks noGrp="1"/>
           </p:cNvSpPr>
           <p:nvPr>
-            <p:ph type="body" idx="3" sz="quarter"/>
+            <p:ph type="body" sz="quarter" idx="3"/>
           </p:nvPr>
         </p:nvSpPr>
         <p:spPr/>
@@ -628,7 +627,7 @@
           <a:lstStyle/>
           <a:p>
             <a:r>
-              <a:t>Demo 2. Same dataset, same prompts, two tools. We run Copilot and Claude side by side on an expense categorization task to see where each shines. The point is not to crown a winner but to build the judgment for when to use which. All prompts are in the Demo 2 Prompt Guide in folder 2-claude-vs-copilot.</a:t>
+              <a:t>Open it up. Good questions to seed if the room is quiet: which of the three patterns — style guide or logging — would you try first on Monday? Are there workbooks you would NOT want to use Copilot on even with the shield, and why?</a:t>
             </a:r>
           </a:p>
         </p:txBody>
@@ -640,7 +639,7 @@
             <a:spLocks noGrp="1"/>
           </p:cNvSpPr>
           <p:nvPr>
-            <p:ph type="sldNum" idx="5" sz="quarter"/>
+            <p:ph type="sldNum" sz="quarter" idx="5"/>
           </p:nvPr>
         </p:nvSpPr>
         <p:spPr/>
@@ -653,8 +652,8 @@
 </p:notes>
 </file>
 
-<file path=ppt/notesSlides/notesSlide15.xml><?xml version="1.0" encoding="utf-8"?>
-<p:notes xmlns:a="http://schemas.openxmlformats.org/drawingml/2006/main" xmlns:p="http://schemas.openxmlformats.org/presentationml/2006/main" xmlns:r="http://schemas.openxmlformats.org/officeDocument/2006/relationships">
+<file path=ppt/notesSlides/notesSlide11.xml><?xml version="1.0" encoding="utf-8"?>
+<p:notes xmlns:a="http://schemas.openxmlformats.org/drawingml/2006/main" xmlns:r="http://schemas.openxmlformats.org/officeDocument/2006/relationships" xmlns:p="http://schemas.openxmlformats.org/presentationml/2006/main">
   <p:cSld>
     <p:spTree>
       <p:nvGrpSpPr>
@@ -674,7 +673,7 @@
         <p:nvSpPr>
           <p:cNvPr id="2" name="Slide Image Placeholder 1"/>
           <p:cNvSpPr>
-            <a:spLocks noGrp="1"/>
+            <a:spLocks noGrp="1" noRot="1" noChangeAspect="1"/>
           </p:cNvSpPr>
           <p:nvPr>
             <p:ph type="sldImg" idx="2"/>
@@ -689,7 +688,7 @@
             <a:spLocks noGrp="1"/>
           </p:cNvSpPr>
           <p:nvPr>
-            <p:ph type="body" idx="3" sz="quarter"/>
+            <p:ph type="body" sz="quarter" idx="3"/>
           </p:nvPr>
         </p:nvSpPr>
         <p:spPr/>
@@ -698,7 +697,7 @@
           <a:lstStyle/>
           <a:p>
             <a:r>
-              <a:t>Demo 3. I will open copilot-logging-demo.xlsx and run the three prompts live. I am going to actually close and reopen the file so you can see the resume prompt work from cold. Watch the CopilotLog sheet fill in as we go — that is the thing you hand to your reviewer.</a:t>
+              <a:t>Thanks for hanging in. See you tomorrow for Day 4 — Office Scripts and Power Automate.</a:t>
             </a:r>
           </a:p>
         </p:txBody>
@@ -710,147 +709,7 @@
             <a:spLocks noGrp="1"/>
           </p:cNvSpPr>
           <p:nvPr>
-            <p:ph type="sldNum" idx="5" sz="quarter"/>
-          </p:nvPr>
-        </p:nvSpPr>
-        <p:spPr/>
-      </p:sp>
-    </p:spTree>
-  </p:cSld>
-  <p:clrMapOvr>
-    <a:masterClrMapping/>
-  </p:clrMapOvr>
-</p:notes>
-</file>
-
-<file path=ppt/notesSlides/notesSlide18.xml><?xml version="1.0" encoding="utf-8"?>
-<p:notes xmlns:a="http://schemas.openxmlformats.org/drawingml/2006/main" xmlns:p="http://schemas.openxmlformats.org/presentationml/2006/main" xmlns:r="http://schemas.openxmlformats.org/officeDocument/2006/relationships">
-  <p:cSld>
-    <p:spTree>
-      <p:nvGrpSpPr>
-        <p:cNvPr id="1" name=""/>
-        <p:cNvGrpSpPr/>
-        <p:nvPr/>
-      </p:nvGrpSpPr>
-      <p:grpSpPr>
-        <a:xfrm>
-          <a:off x="0" y="0"/>
-          <a:ext cx="0" cy="0"/>
-          <a:chOff x="0" y="0"/>
-          <a:chExt cx="0" cy="0"/>
-        </a:xfrm>
-      </p:grpSpPr>
-      <p:sp>
-        <p:nvSpPr>
-          <p:cNvPr id="2" name="Slide Image Placeholder 1"/>
-          <p:cNvSpPr>
-            <a:spLocks noGrp="1"/>
-          </p:cNvSpPr>
-          <p:nvPr>
-            <p:ph type="sldImg" idx="2"/>
-          </p:nvPr>
-        </p:nvSpPr>
-        <p:spPr/>
-      </p:sp>
-      <p:sp>
-        <p:nvSpPr>
-          <p:cNvPr id="3" name="Notes Placeholder 2"/>
-          <p:cNvSpPr>
-            <a:spLocks noGrp="1"/>
-          </p:cNvSpPr>
-          <p:nvPr>
-            <p:ph type="body" idx="3" sz="quarter"/>
-          </p:nvPr>
-        </p:nvSpPr>
-        <p:spPr/>
-        <p:txBody>
-          <a:bodyPr/>
-          <a:lstStyle/>
-          <a:p>
-            <a:r>
-              <a:t>Open it up. Good questions to seed if the room is quiet: which of the three patterns — style guide or logging — would you try first on Monday? Are there workbooks you would NOT want to use Copilot on even with the shield, and why?</a:t>
-            </a:r>
-          </a:p>
-        </p:txBody>
-      </p:sp>
-      <p:sp>
-        <p:nvSpPr>
-          <p:cNvPr id="4" name="Slide Number Placeholder 3"/>
-          <p:cNvSpPr>
-            <a:spLocks noGrp="1"/>
-          </p:cNvSpPr>
-          <p:nvPr>
-            <p:ph type="sldNum" idx="5" sz="quarter"/>
-          </p:nvPr>
-        </p:nvSpPr>
-        <p:spPr/>
-      </p:sp>
-    </p:spTree>
-  </p:cSld>
-  <p:clrMapOvr>
-    <a:masterClrMapping/>
-  </p:clrMapOvr>
-</p:notes>
-</file>
-
-<file path=ppt/notesSlides/notesSlide19.xml><?xml version="1.0" encoding="utf-8"?>
-<p:notes xmlns:a="http://schemas.openxmlformats.org/drawingml/2006/main" xmlns:p="http://schemas.openxmlformats.org/presentationml/2006/main" xmlns:r="http://schemas.openxmlformats.org/officeDocument/2006/relationships">
-  <p:cSld>
-    <p:spTree>
-      <p:nvGrpSpPr>
-        <p:cNvPr id="1" name=""/>
-        <p:cNvGrpSpPr/>
-        <p:nvPr/>
-      </p:nvGrpSpPr>
-      <p:grpSpPr>
-        <a:xfrm>
-          <a:off x="0" y="0"/>
-          <a:ext cx="0" cy="0"/>
-          <a:chOff x="0" y="0"/>
-          <a:chExt cx="0" cy="0"/>
-        </a:xfrm>
-      </p:grpSpPr>
-      <p:sp>
-        <p:nvSpPr>
-          <p:cNvPr id="2" name="Slide Image Placeholder 1"/>
-          <p:cNvSpPr>
-            <a:spLocks noGrp="1"/>
-          </p:cNvSpPr>
-          <p:nvPr>
-            <p:ph type="sldImg" idx="2"/>
-          </p:nvPr>
-        </p:nvSpPr>
-        <p:spPr/>
-      </p:sp>
-      <p:sp>
-        <p:nvSpPr>
-          <p:cNvPr id="3" name="Notes Placeholder 2"/>
-          <p:cNvSpPr>
-            <a:spLocks noGrp="1"/>
-          </p:cNvSpPr>
-          <p:nvPr>
-            <p:ph type="body" idx="3" sz="quarter"/>
-          </p:nvPr>
-        </p:nvSpPr>
-        <p:spPr/>
-        <p:txBody>
-          <a:bodyPr/>
-          <a:lstStyle/>
-          <a:p>
-            <a:r>
-              <a:t>Thanks for hanging in. See you tomorrow for Day 4 — Office Scripts and Power Automate.</a:t>
-            </a:r>
-          </a:p>
-        </p:txBody>
-      </p:sp>
-      <p:sp>
-        <p:nvSpPr>
-          <p:cNvPr id="4" name="Slide Number Placeholder 3"/>
-          <p:cNvSpPr>
-            <a:spLocks noGrp="1"/>
-          </p:cNvSpPr>
-          <p:nvPr>
-            <p:ph type="sldNum" idx="5" sz="quarter"/>
+            <p:ph type="sldNum" sz="quarter" idx="5"/>
           </p:nvPr>
         </p:nvSpPr>
         <p:spPr/>
@@ -1019,6 +878,76 @@
 </p:notes>
 </file>
 
+<file path=ppt/notesSlides/notesSlide4.xml><?xml version="1.0" encoding="utf-8"?>
+<p:notes xmlns:a="http://schemas.openxmlformats.org/drawingml/2006/main" xmlns:r="http://schemas.openxmlformats.org/officeDocument/2006/relationships" xmlns:p="http://schemas.openxmlformats.org/presentationml/2006/main">
+  <p:cSld>
+    <p:spTree>
+      <p:nvGrpSpPr>
+        <p:cNvPr id="1" name=""/>
+        <p:cNvGrpSpPr/>
+        <p:nvPr/>
+      </p:nvGrpSpPr>
+      <p:grpSpPr>
+        <a:xfrm>
+          <a:off x="0" y="0"/>
+          <a:ext cx="0" cy="0"/>
+          <a:chOff x="0" y="0"/>
+          <a:chExt cx="0" cy="0"/>
+        </a:xfrm>
+      </p:grpSpPr>
+      <p:sp>
+        <p:nvSpPr>
+          <p:cNvPr id="2" name="Slide Image Placeholder 1"/>
+          <p:cNvSpPr>
+            <a:spLocks noGrp="1" noRot="1" noChangeAspect="1"/>
+          </p:cNvSpPr>
+          <p:nvPr>
+            <p:ph type="sldImg" idx="2"/>
+          </p:nvPr>
+        </p:nvSpPr>
+        <p:spPr/>
+      </p:sp>
+      <p:sp>
+        <p:nvSpPr>
+          <p:cNvPr id="3" name="Notes Placeholder 2"/>
+          <p:cNvSpPr>
+            <a:spLocks noGrp="1"/>
+          </p:cNvSpPr>
+          <p:nvPr>
+            <p:ph type="body" sz="quarter" idx="3"/>
+          </p:nvPr>
+        </p:nvSpPr>
+        <p:spPr/>
+        <p:txBody>
+          <a:bodyPr/>
+          <a:lstStyle/>
+          <a:p>
+            <a:r>
+              <a:t>Heads-up on what has changed. Advanced Analysis with Python — the feature that let Copilot run clustering or regression directly — has been folded back into regular Copilot. Same for Agent Mode, the multi-step build-me-a-whole-model feature. So instead of three surfaces and three license tiers, you now have one Copilot pane that is broader and deeper than it used to be. The risk: it is more tempting to treat it as a black box. Our job today is to stay in the driver's seat.</a:t>
+            </a:r>
+          </a:p>
+        </p:txBody>
+      </p:sp>
+      <p:sp>
+        <p:nvSpPr>
+          <p:cNvPr id="4" name="Slide Number Placeholder 3"/>
+          <p:cNvSpPr>
+            <a:spLocks noGrp="1"/>
+          </p:cNvSpPr>
+          <p:nvPr>
+            <p:ph type="sldNum" sz="quarter" idx="5"/>
+          </p:nvPr>
+        </p:nvSpPr>
+        <p:spPr/>
+      </p:sp>
+    </p:spTree>
+  </p:cSld>
+  <p:clrMapOvr>
+    <a:masterClrMapping/>
+  </p:clrMapOvr>
+</p:notes>
+</file>
+
 <file path=ppt/notesSlides/notesSlide5.xml><?xml version="1.0" encoding="utf-8"?>
 <p:notes xmlns:a="http://schemas.openxmlformats.org/drawingml/2006/main" xmlns:r="http://schemas.openxmlformats.org/officeDocument/2006/relationships" xmlns:p="http://schemas.openxmlformats.org/presentationml/2006/main">
   <p:cSld>
@@ -1043,7 +972,7 @@
             <a:spLocks noGrp="1" noRot="1" noChangeAspect="1"/>
           </p:cNvSpPr>
           <p:nvPr>
-            <p:ph type="sldImg"/>
+            <p:ph type="sldImg" idx="2"/>
           </p:nvPr>
         </p:nvSpPr>
         <p:spPr/>
@@ -1055,7 +984,7 @@
             <a:spLocks noGrp="1"/>
           </p:cNvSpPr>
           <p:nvPr>
-            <p:ph type="body" idx="1"/>
+            <p:ph type="body" sz="quarter" idx="3"/>
           </p:nvPr>
         </p:nvSpPr>
         <p:spPr/>
@@ -1064,8 +993,10 @@
           <a:lstStyle/>
           <a:p>
             <a:r>
-              <a:t>Pulling back to the big picture for a second. AI in Excel is only one layer. You still need to get data in, secure it, and move results across systems. Power Automate connects Excel logic to business processes. Dataverse keeps the data consistent enough that AI can trust it. Together these tools make Copilot reliable and scalable, not just impressive in a demo.</a:t>
-            </a:r>
+              <a:rPr lang="en-US" dirty="0"/>
+              <a:t>What I like to show here is how Copilot behaves when you don’t really give it much to go on. It’ll do the job, but you start to see some patterns pretty quickly—things like defaulting to cell references, using older functions like VLOOKUP, and producing charts that aren’t all that consistent. Nothing is technically wrong, it just feels a little… generic. The shift happens when you give it a reference point, like a data visualization style guide. Now instead of just generating something, it’s making decisions based on a standard. When you rerun the exact same prompts, the output feels a lot more intentional and a lot more defensible, which is really the goal.</a:t>
+            </a:r>
+            <a:endParaRPr dirty="0"/>
           </a:p>
         </p:txBody>
       </p:sp>
@@ -1080,24 +1011,8 @@
           </p:nvPr>
         </p:nvSpPr>
         <p:spPr/>
-        <p:txBody>
-          <a:bodyPr/>
-          <a:lstStyle/>
-          <a:p>
-            <a:fld id="{FFB500C5-13F7-48FC-8160-C29AECF6C602}" type="slidenum">
-              <a:rPr lang="en-US" smtClean="0"/>
-              <a:t>5</a:t>
-            </a:fld>
-            <a:endParaRPr lang="en-US"/>
-          </a:p>
-        </p:txBody>
       </p:sp>
     </p:spTree>
-    <p:extLst>
-      <p:ext uri="{BB962C8B-B14F-4D97-AF65-F5344CB8AC3E}">
-        <p14:creationId xmlns:p14="http://schemas.microsoft.com/office/powerpoint/2010/main" val="1354516654"/>
-      </p:ext>
-    </p:extLst>
   </p:cSld>
   <p:clrMapOvr>
     <a:masterClrMapping/>
@@ -1129,7 +1044,7 @@
             <a:spLocks noGrp="1" noRot="1" noChangeAspect="1"/>
           </p:cNvSpPr>
           <p:nvPr>
-            <p:ph type="sldImg"/>
+            <p:ph type="sldImg" idx="2"/>
           </p:nvPr>
         </p:nvSpPr>
         <p:spPr/>
@@ -1141,7 +1056,7 @@
             <a:spLocks noGrp="1"/>
           </p:cNvSpPr>
           <p:nvPr>
-            <p:ph type="body" idx="1"/>
+            <p:ph type="body" sz="quarter" idx="3"/>
           </p:nvPr>
         </p:nvSpPr>
         <p:spPr/>
@@ -1150,8 +1065,10 @@
           <a:lstStyle/>
           <a:p>
             <a:r>
-              <a:t>Tomorrow we move from getting analysis done inside Excel to pushing analysis out of Excel automatically. Office Scripts automate the clicks you already take. Power Automate turns those scripts into real workflows. Flows push results to Teams, Outlook, SharePoint. Together they form the execution layer that carries your work beyond the workbook.</a:t>
-            </a:r>
+              <a:rPr lang="en-US" dirty="0"/>
+              <a:t>Here the setup is simple on purpose: same data, same prompts, just two different tools. That lets you really see how each one behaves. Copilot works directly in Excel, so it’s editing your file in place, which is great for speed and workflow but does require some trust. Claude, on the other hand, tends to give you output that you then bring into Excel, so there’s a bit more separation. What I usually tell people is this isn’t about picking a winner. It’s more about understanding where the work lives and how sensitive your data is. In practice, most teams end up using both—Copilot for hands-on Excel work, and Claude for things that sit around Excel like summaries or deliverables.</a:t>
+            </a:r>
+            <a:endParaRPr dirty="0"/>
           </a:p>
         </p:txBody>
       </p:sp>
@@ -1166,24 +1083,8 @@
           </p:nvPr>
         </p:nvSpPr>
         <p:spPr/>
-        <p:txBody>
-          <a:bodyPr/>
-          <a:lstStyle/>
-          <a:p>
-            <a:fld id="{FFB500C5-13F7-48FC-8160-C29AECF6C602}" type="slidenum">
-              <a:rPr lang="en-US" smtClean="0"/>
-              <a:t>6</a:t>
-            </a:fld>
-            <a:endParaRPr lang="en-US"/>
-          </a:p>
-        </p:txBody>
       </p:sp>
     </p:spTree>
-    <p:extLst>
-      <p:ext uri="{BB962C8B-B14F-4D97-AF65-F5344CB8AC3E}">
-        <p14:creationId xmlns:p14="http://schemas.microsoft.com/office/powerpoint/2010/main" val="217584689"/>
-      </p:ext>
-    </p:extLst>
   </p:cSld>
   <p:clrMapOvr>
     <a:masterClrMapping/>
@@ -1192,7 +1093,7 @@
 </file>
 
 <file path=ppt/notesSlides/notesSlide7.xml><?xml version="1.0" encoding="utf-8"?>
-<p:notes xmlns:a="http://schemas.openxmlformats.org/drawingml/2006/main" xmlns:p="http://schemas.openxmlformats.org/presentationml/2006/main" xmlns:r="http://schemas.openxmlformats.org/officeDocument/2006/relationships">
+<p:notes xmlns:a="http://schemas.openxmlformats.org/drawingml/2006/main" xmlns:r="http://schemas.openxmlformats.org/officeDocument/2006/relationships" xmlns:p="http://schemas.openxmlformats.org/presentationml/2006/main">
   <p:cSld>
     <p:spTree>
       <p:nvGrpSpPr>
@@ -1212,7 +1113,7 @@
         <p:nvSpPr>
           <p:cNvPr id="2" name="Slide Image Placeholder 1"/>
           <p:cNvSpPr>
-            <a:spLocks noGrp="1"/>
+            <a:spLocks noGrp="1" noRot="1" noChangeAspect="1"/>
           </p:cNvSpPr>
           <p:nvPr>
             <p:ph type="sldImg" idx="2"/>
@@ -1227,7 +1128,7 @@
             <a:spLocks noGrp="1"/>
           </p:cNvSpPr>
           <p:nvPr>
-            <p:ph type="body" idx="3" sz="quarter"/>
+            <p:ph type="body" sz="quarter" idx="3"/>
           </p:nvPr>
         </p:nvSpPr>
         <p:spPr/>
@@ -1236,8 +1137,10 @@
           <a:lstStyle/>
           <a:p>
             <a:r>
-              <a:t>Heads-up on what has changed. Advanced Analysis with Python — the feature that let Copilot run clustering or regression directly — has been folded back into regular Copilot. Same for Agent Mode, the multi-step build-me-a-whole-model feature. So instead of three surfaces and three license tiers, you now have one Copilot pane that is broader and deeper than it used to be. The risk: it is more tempting to treat it as a black box. Our job today is to stay in the driver's seat.</a:t>
-            </a:r>
+              <a:rPr lang="en-US" dirty="0"/>
+              <a:t>This is probably the biggest practical issue people run into: Copilot doesn’t remember what it did last time, so there’s no real trail of what changed or why. That’s where this logging pattern comes in. Instead of relying on the chat, you have the AI write a log of its own actions directly into the workbook. It’s a simple three-step approach: set up the log once, have it add to the log every time it does work, and then when you reopen the file, have it read the log and pick back up. What’s nice is you can actually demonstrate continuity—close the file, reopen it, and keep going. It turns the whole experience from something a bit opaque into something you can actually explain and defend, especially if someone else needs to review your work.</a:t>
+            </a:r>
+            <a:endParaRPr dirty="0"/>
           </a:p>
         </p:txBody>
       </p:sp>
@@ -1248,7 +1151,7 @@
             <a:spLocks noGrp="1"/>
           </p:cNvSpPr>
           <p:nvPr>
-            <p:ph type="sldNum" idx="5" sz="quarter"/>
+            <p:ph type="sldNum" sz="quarter" idx="5"/>
           </p:nvPr>
         </p:nvSpPr>
         <p:spPr/>
@@ -1262,7 +1165,7 @@
 </file>
 
 <file path=ppt/notesSlides/notesSlide8.xml><?xml version="1.0" encoding="utf-8"?>
-<p:notes xmlns:a="http://schemas.openxmlformats.org/drawingml/2006/main" xmlns:p="http://schemas.openxmlformats.org/presentationml/2006/main" xmlns:r="http://schemas.openxmlformats.org/officeDocument/2006/relationships">
+<p:notes xmlns:a="http://schemas.openxmlformats.org/drawingml/2006/main" xmlns:r="http://schemas.openxmlformats.org/officeDocument/2006/relationships" xmlns:p="http://schemas.openxmlformats.org/presentationml/2006/main">
   <p:cSld>
     <p:spTree>
       <p:nvGrpSpPr>
@@ -1282,10 +1185,10 @@
         <p:nvSpPr>
           <p:cNvPr id="2" name="Slide Image Placeholder 1"/>
           <p:cNvSpPr>
-            <a:spLocks noGrp="1"/>
-          </p:cNvSpPr>
-          <p:nvPr>
-            <p:ph type="sldImg" idx="2"/>
+            <a:spLocks noGrp="1" noRot="1" noChangeAspect="1"/>
+          </p:cNvSpPr>
+          <p:nvPr>
+            <p:ph type="sldImg"/>
           </p:nvPr>
         </p:nvSpPr>
         <p:spPr/>
@@ -1297,7 +1200,7 @@
             <a:spLocks noGrp="1"/>
           </p:cNvSpPr>
           <p:nvPr>
-            <p:ph type="body" idx="3" sz="quarter"/>
+            <p:ph type="body" idx="1"/>
           </p:nvPr>
         </p:nvSpPr>
         <p:spPr/>
@@ -1306,7 +1209,7 @@
           <a:lstStyle/>
           <a:p>
             <a:r>
-              <a:t>Four things Copilot in Excel is genuinely great at, that most people under-use: formatting and highlighting (conditional formats, data bars, flags), calculated columns (new fields, categories, unit conversions), PivotTables and charts (quick summaries and visuals), and formulas with explanations (write, fix, translate in plain English). If all you ever use Copilot for is these four, you will still get most of the value.</a:t>
+              <a:t>Pulling back to the big picture for a second. AI in Excel is only one layer. You still need to get data in, secure it, and move results across systems. Power Automate connects Excel logic to business processes. Dataverse keeps the data consistent enough that AI can trust it. Together these tools make Copilot reliable and scalable, not just impressive in a demo.</a:t>
             </a:r>
           </a:p>
         </p:txBody>
@@ -1318,12 +1221,28 @@
             <a:spLocks noGrp="1"/>
           </p:cNvSpPr>
           <p:nvPr>
-            <p:ph type="sldNum" idx="5" sz="quarter"/>
+            <p:ph type="sldNum" sz="quarter" idx="5"/>
           </p:nvPr>
         </p:nvSpPr>
         <p:spPr/>
+        <p:txBody>
+          <a:bodyPr/>
+          <a:lstStyle/>
+          <a:p>
+            <a:fld id="{FFB500C5-13F7-48FC-8160-C29AECF6C602}" type="slidenum">
+              <a:rPr lang="en-US" smtClean="0"/>
+              <a:t>8</a:t>
+            </a:fld>
+            <a:endParaRPr lang="en-US"/>
+          </a:p>
+        </p:txBody>
       </p:sp>
     </p:spTree>
+    <p:extLst>
+      <p:ext uri="{BB962C8B-B14F-4D97-AF65-F5344CB8AC3E}">
+        <p14:creationId xmlns:p14="http://schemas.microsoft.com/office/powerpoint/2010/main" val="1354516654"/>
+      </p:ext>
+    </p:extLst>
   </p:cSld>
   <p:clrMapOvr>
     <a:masterClrMapping/>
@@ -1332,7 +1251,7 @@
 </file>
 
 <file path=ppt/notesSlides/notesSlide9.xml><?xml version="1.0" encoding="utf-8"?>
-<p:notes xmlns:a="http://schemas.openxmlformats.org/drawingml/2006/main" xmlns:p="http://schemas.openxmlformats.org/presentationml/2006/main" xmlns:r="http://schemas.openxmlformats.org/officeDocument/2006/relationships">
+<p:notes xmlns:a="http://schemas.openxmlformats.org/drawingml/2006/main" xmlns:r="http://schemas.openxmlformats.org/officeDocument/2006/relationships" xmlns:p="http://schemas.openxmlformats.org/presentationml/2006/main">
   <p:cSld>
     <p:spTree>
       <p:nvGrpSpPr>
@@ -1352,10 +1271,10 @@
         <p:nvSpPr>
           <p:cNvPr id="2" name="Slide Image Placeholder 1"/>
           <p:cNvSpPr>
-            <a:spLocks noGrp="1"/>
-          </p:cNvSpPr>
-          <p:nvPr>
-            <p:ph type="sldImg" idx="2"/>
+            <a:spLocks noGrp="1" noRot="1" noChangeAspect="1"/>
+          </p:cNvSpPr>
+          <p:nvPr>
+            <p:ph type="sldImg"/>
           </p:nvPr>
         </p:nvSpPr>
         <p:spPr/>
@@ -1367,7 +1286,7 @@
             <a:spLocks noGrp="1"/>
           </p:cNvSpPr>
           <p:nvPr>
-            <p:ph type="body" idx="3" sz="quarter"/>
+            <p:ph type="body" idx="1"/>
           </p:nvPr>
         </p:nvSpPr>
         <p:spPr/>
@@ -1376,7 +1295,7 @@
           <a:lstStyle/>
           <a:p>
             <a:r>
-              <a:t>Demo 1. I will open penguins.xlsx and run the four everyday wins end-to-end. Stay in the Copilot pane the whole time. I will keep each prompt short so you can see the shape of a good instruction. Watch how Copilot handles structured data — prompts that reference column names work better than prompts that reference cell addresses. If you get lost, all the prompts I use here are in the Day 3 demo notes handout.</a:t>
+              <a:t>Tomorrow we move from getting analysis done inside Excel to pushing analysis out of Excel automatically. Office Scripts automate the clicks you already take. Power Automate turns those scripts into real workflows. Flows push results to Teams, Outlook, SharePoint. Together they form the execution layer that carries your work beyond the workbook.</a:t>
             </a:r>
           </a:p>
         </p:txBody>
@@ -1388,12 +1307,28 @@
             <a:spLocks noGrp="1"/>
           </p:cNvSpPr>
           <p:nvPr>
-            <p:ph type="sldNum" idx="5" sz="quarter"/>
+            <p:ph type="sldNum" sz="quarter" idx="5"/>
           </p:nvPr>
         </p:nvSpPr>
         <p:spPr/>
+        <p:txBody>
+          <a:bodyPr/>
+          <a:lstStyle/>
+          <a:p>
+            <a:fld id="{FFB500C5-13F7-48FC-8160-C29AECF6C602}" type="slidenum">
+              <a:rPr lang="en-US" smtClean="0"/>
+              <a:t>9</a:t>
+            </a:fld>
+            <a:endParaRPr lang="en-US"/>
+          </a:p>
+        </p:txBody>
       </p:sp>
     </p:spTree>
+    <p:extLst>
+      <p:ext uri="{BB962C8B-B14F-4D97-AF65-F5344CB8AC3E}">
+        <p14:creationId xmlns:p14="http://schemas.microsoft.com/office/powerpoint/2010/main" val="217584689"/>
+      </p:ext>
+    </p:extLst>
   </p:cSld>
   <p:clrMapOvr>
     <a:masterClrMapping/>
@@ -1581,7 +1516,7 @@
             <a:fld id="{1D8BD707-D9CF-40AE-B4C6-C98DA3205C09}" type="datetimeFigureOut">
               <a:rPr lang="en-US" smtClean="0"/>
               <a:pPr/>
-              <a:t>4/8/2026</a:t>
+              <a:t>4/16/2026</a:t>
             </a:fld>
             <a:endParaRPr lang="en-US"/>
           </a:p>
@@ -1746,7 +1681,7 @@
             <a:fld id="{1D8BD707-D9CF-40AE-B4C6-C98DA3205C09}" type="datetimeFigureOut">
               <a:rPr lang="en-US" smtClean="0"/>
               <a:pPr/>
-              <a:t>4/8/2026</a:t>
+              <a:t>4/16/2026</a:t>
             </a:fld>
             <a:endParaRPr lang="en-US"/>
           </a:p>
@@ -1921,7 +1856,7 @@
             <a:fld id="{1D8BD707-D9CF-40AE-B4C6-C98DA3205C09}" type="datetimeFigureOut">
               <a:rPr lang="en-US" smtClean="0"/>
               <a:pPr/>
-              <a:t>4/8/2026</a:t>
+              <a:t>4/16/2026</a:t>
             </a:fld>
             <a:endParaRPr lang="en-US"/>
           </a:p>
@@ -2086,7 +2021,7 @@
             <a:fld id="{1D8BD707-D9CF-40AE-B4C6-C98DA3205C09}" type="datetimeFigureOut">
               <a:rPr lang="en-US" smtClean="0"/>
               <a:pPr/>
-              <a:t>4/8/2026</a:t>
+              <a:t>4/16/2026</a:t>
             </a:fld>
             <a:endParaRPr lang="en-US"/>
           </a:p>
@@ -2328,7 +2263,7 @@
             <a:fld id="{1D8BD707-D9CF-40AE-B4C6-C98DA3205C09}" type="datetimeFigureOut">
               <a:rPr lang="en-US" smtClean="0"/>
               <a:pPr/>
-              <a:t>4/8/2026</a:t>
+              <a:t>4/16/2026</a:t>
             </a:fld>
             <a:endParaRPr lang="en-US"/>
           </a:p>
@@ -2610,7 +2545,7 @@
             <a:fld id="{1D8BD707-D9CF-40AE-B4C6-C98DA3205C09}" type="datetimeFigureOut">
               <a:rPr lang="en-US" smtClean="0"/>
               <a:pPr/>
-              <a:t>4/8/2026</a:t>
+              <a:t>4/16/2026</a:t>
             </a:fld>
             <a:endParaRPr lang="en-US"/>
           </a:p>
@@ -3026,7 +2961,7 @@
             <a:fld id="{1D8BD707-D9CF-40AE-B4C6-C98DA3205C09}" type="datetimeFigureOut">
               <a:rPr lang="en-US" smtClean="0"/>
               <a:pPr/>
-              <a:t>4/8/2026</a:t>
+              <a:t>4/16/2026</a:t>
             </a:fld>
             <a:endParaRPr lang="en-US"/>
           </a:p>
@@ -3140,7 +3075,7 @@
             <a:fld id="{1D8BD707-D9CF-40AE-B4C6-C98DA3205C09}" type="datetimeFigureOut">
               <a:rPr lang="en-US" smtClean="0"/>
               <a:pPr/>
-              <a:t>4/8/2026</a:t>
+              <a:t>4/16/2026</a:t>
             </a:fld>
             <a:endParaRPr lang="en-US"/>
           </a:p>
@@ -3232,7 +3167,7 @@
             <a:fld id="{1D8BD707-D9CF-40AE-B4C6-C98DA3205C09}" type="datetimeFigureOut">
               <a:rPr lang="en-US" smtClean="0"/>
               <a:pPr/>
-              <a:t>4/8/2026</a:t>
+              <a:t>4/16/2026</a:t>
             </a:fld>
             <a:endParaRPr lang="en-US"/>
           </a:p>
@@ -3504,7 +3439,7 @@
             <a:fld id="{1D8BD707-D9CF-40AE-B4C6-C98DA3205C09}" type="datetimeFigureOut">
               <a:rPr lang="en-US" smtClean="0"/>
               <a:pPr/>
-              <a:t>4/8/2026</a:t>
+              <a:t>4/16/2026</a:t>
             </a:fld>
             <a:endParaRPr lang="en-US"/>
           </a:p>
@@ -3753,7 +3688,7 @@
             <a:fld id="{1D8BD707-D9CF-40AE-B4C6-C98DA3205C09}" type="datetimeFigureOut">
               <a:rPr lang="en-US" smtClean="0"/>
               <a:pPr/>
-              <a:t>4/8/2026</a:t>
+              <a:t>4/16/2026</a:t>
             </a:fld>
             <a:endParaRPr lang="en-US"/>
           </a:p>
@@ -3966,7 +3901,7 @@
             <a:fld id="{1D8BD707-D9CF-40AE-B4C6-C98DA3205C09}" type="datetimeFigureOut">
               <a:rPr lang="en-US" smtClean="0"/>
               <a:pPr/>
-              <a:t>4/8/2026</a:t>
+              <a:t>4/16/2026</a:t>
             </a:fld>
             <a:endParaRPr lang="en-US"/>
           </a:p>
@@ -4500,7 +4435,7 @@
 </file>
 
 <file path=ppt/slides/slide10.xml><?xml version="1.0" encoding="utf-8"?>
-<p:sld xmlns:a="http://schemas.openxmlformats.org/drawingml/2006/main" xmlns:p="http://schemas.openxmlformats.org/presentationml/2006/main" xmlns:r="http://schemas.openxmlformats.org/officeDocument/2006/relationships">
+<p:sld xmlns:a="http://schemas.openxmlformats.org/drawingml/2006/main" xmlns:r="http://schemas.openxmlformats.org/officeDocument/2006/relationships" xmlns:p="http://schemas.openxmlformats.org/presentationml/2006/main">
   <p:cSld>
     <p:spTree>
       <p:nvGrpSpPr>
@@ -4508,161 +4443,53 @@
         <p:cNvGrpSpPr/>
         <p:nvPr/>
       </p:nvGrpSpPr>
-      <p:grpSpPr/>
-      <p:sp>
-        <p:nvSpPr>
-          <p:cNvPr id="11" name="TextBox 10">
+      <p:grpSpPr>
+        <a:xfrm>
+          <a:off x="0" y="0"/>
+          <a:ext cx="0" cy="0"/>
+          <a:chOff x="0" y="0"/>
+          <a:chExt cx="0" cy="0"/>
+        </a:xfrm>
+      </p:grpSpPr>
+      <p:pic>
+        <p:nvPicPr>
+          <p:cNvPr id="10" name="Picture 9"/>
+          <p:cNvPicPr>
+            <a:picLocks noChangeAspect="1"/>
+          </p:cNvPicPr>
+          <p:nvPr/>
+        </p:nvPicPr>
+        <p:blipFill rotWithShape="1">
+          <a:blip r:embed="rId3">
             <a:extLst>
-              <a:ext uri="{FF2B5EF4-FFF2-40B4-BE49-F238E27FC236}">
-                <a16:creationId xmlns:a16="http://schemas.microsoft.com/office/drawing/2014/main" id="{781603C7-76CD-A76B-F955-68F3329D8967}"/>
+              <a:ext uri="{28A0092B-C50C-407E-A947-70E740481C1C}">
+                <a14:useLocalDpi xmlns:a14="http://schemas.microsoft.com/office/drawing/2010/main" val="0"/>
               </a:ext>
             </a:extLst>
-          </p:cNvPr>
-          <p:cNvSpPr txBox="1"/>
-          <p:nvPr/>
-        </p:nvSpPr>
+          </a:blip>
+          <a:srcRect l="50728" t="56371"/>
+          <a:stretch/>
+        </p:blipFill>
         <p:spPr>
           <a:xfrm>
-            <a:off x="520861" y="170082"/>
-            <a:ext cx="14642939" cy="2100000"/>
+            <a:off x="12204691" y="3316148"/>
+            <a:ext cx="6083309" cy="6970854"/>
           </a:xfrm>
           <a:prstGeom prst="rect">
             <a:avLst/>
           </a:prstGeom>
-          <a:noFill/>
         </p:spPr>
-        <p:txBody>
-          <a:bodyPr wrap="square" rtlCol="0">
-            <a:spAutoFit/>
-          </a:bodyPr>
-          <a:lstStyle/>
-          <a:p>
-            <a:r>
-              <a:rPr lang="en-US" sz="4400" dirty="0">
-                <a:latin typeface="Aliens &amp; cows" panose="00000500000000000000" pitchFamily="2" charset="0"/>
-              </a:rPr>
-              <a:t>The four everyday wins</a:t>
-            </a:r>
-          </a:p>
-        </p:txBody>
-      </p:sp>
-      <p:sp>
-        <p:nvSpPr>
-          <p:cNvPr id="3" name="TextBox 2">
-            <a:extLst>
-              <a:ext uri="{FF2B5EF4-FFF2-40B4-BE49-F238E27FC236}">
-                <a16:creationId xmlns:a16="http://schemas.microsoft.com/office/drawing/2014/main" id="{5F84214C-EACA-355D-FAEB-44DBEAE3040B}"/>
-              </a:ext>
-            </a:extLst>
-          </p:cNvPr>
-          <p:cNvSpPr txBox="1"/>
-          <p:nvPr/>
-        </p:nvSpPr>
-        <p:spPr>
-          <a:xfrm>
-            <a:off x="520861" y="2350000"/>
-            <a:ext cx="14393120" cy="7300000"/>
-          </a:xfrm>
-          <a:prstGeom prst="rect">
-            <a:avLst/>
-          </a:prstGeom>
-          <a:noFill/>
-        </p:spPr>
-        <p:txBody>
-          <a:bodyPr wrap="square" rtlCol="0">
-            <a:spAutoFit/>
-          </a:bodyPr>
-          <a:lstStyle/>
-          <a:p>
-            <a:pPr marL="685800" indent="-685800">
-              <a:buClr>
-                <a:srgbClr val="CF3338"/>
-              </a:buClr>
-              <a:buFont typeface="Arial" panose="020B0604020202020204" pitchFamily="34" charset="0"/>
-              <a:buChar char="•"/>
-            </a:pPr>
-            <a:r>
-              <a:rPr lang="en-US" sz="2800" dirty="0">
-                <a:solidFill>
-                  <a:srgbClr val="707070"/>
-                </a:solidFill>
-                <a:latin typeface="Pragmatica" panose="020B0403040502020204" pitchFamily="34" charset="0"/>
-              </a:rPr>
-              <a:t>Formatting and highlighting — conditional formats, data bars, flags</a:t>
-            </a:r>
-          </a:p>
-          <a:p>
-            <a:pPr marL="685800" indent="-685800">
-              <a:buClr>
-                <a:srgbClr val="CF3338"/>
-              </a:buClr>
-              <a:buFont typeface="Arial" panose="020B0604020202020204" pitchFamily="34" charset="0"/>
-              <a:buChar char="•"/>
-            </a:pPr>
-            <a:r>
-              <a:rPr lang="en-US" sz="2800" dirty="0">
-                <a:solidFill>
-                  <a:srgbClr val="707070"/>
-                </a:solidFill>
-                <a:latin typeface="Pragmatica" panose="020B0403040502020204" pitchFamily="34" charset="0"/>
-              </a:rPr>
-              <a:t>Calculated columns — new fields, categories, unit conversions</a:t>
-            </a:r>
-          </a:p>
-          <a:p>
-            <a:pPr marL="685800" indent="-685800">
-              <a:buClr>
-                <a:srgbClr val="CF3338"/>
-              </a:buClr>
-              <a:buFont typeface="Arial" panose="020B0604020202020204" pitchFamily="34" charset="0"/>
-              <a:buChar char="•"/>
-            </a:pPr>
-            <a:r>
-              <a:rPr lang="en-US" sz="2800" dirty="0">
-                <a:solidFill>
-                  <a:srgbClr val="707070"/>
-                </a:solidFill>
-                <a:latin typeface="Pragmatica" panose="020B0403040502020204" pitchFamily="34" charset="0"/>
-              </a:rPr>
-              <a:t>PivotTables and charts — summaries, comparisons, quick visuals</a:t>
-            </a:r>
-          </a:p>
-          <a:p>
-            <a:pPr marL="685800" indent="-685800">
-              <a:buClr>
-                <a:srgbClr val="CF3338"/>
-              </a:buClr>
-              <a:buFont typeface="Arial" panose="020B0604020202020204" pitchFamily="34" charset="0"/>
-              <a:buChar char="•"/>
-            </a:pPr>
-            <a:r>
-              <a:rPr lang="en-US" sz="2800" dirty="0">
-                <a:solidFill>
-                  <a:srgbClr val="707070"/>
-                </a:solidFill>
-                <a:latin typeface="Pragmatica" panose="020B0403040502020204" pitchFamily="34" charset="0"/>
-              </a:rPr>
-              <a:t>Formulas and explanations — write, fix, and translate formulas in plain English</a:t>
-            </a:r>
-          </a:p>
-        </p:txBody>
-      </p:sp>
+      </p:pic>
       <p:pic>
         <p:nvPicPr>
-          <p:cNvPr id="15" name="Picture 14" descr="A close up of a sign  Description automatically generated">
-            <a:extLst>
-              <a:ext uri="{FF2B5EF4-FFF2-40B4-BE49-F238E27FC236}">
-                <a16:creationId xmlns:a16="http://schemas.microsoft.com/office/drawing/2014/main" id="{6959BD9D-5738-BA78-737D-3115164D42C1}"/>
-              </a:ext>
-            </a:extLst>
-          </p:cNvPr>
+          <p:cNvPr id="4" name="Picture 3"/>
           <p:cNvPicPr>
             <a:picLocks noChangeAspect="1"/>
           </p:cNvPicPr>
           <p:nvPr/>
         </p:nvPicPr>
         <p:blipFill>
-          <a:blip r:embed="rId2">
+          <a:blip r:embed="rId4">
             <a:extLst>
               <a:ext uri="{28A0092B-C50C-407E-A947-70E740481C1C}">
                 <a14:useLocalDpi xmlns:a14="http://schemas.microsoft.com/office/drawing/2010/main" val="0"/>
@@ -4675,8 +4502,77 @@
         </p:blipFill>
         <p:spPr>
           <a:xfrm>
-            <a:off x="16341036" y="8058429"/>
-            <a:ext cx="1942857" cy="2228571"/>
+            <a:off x="-807744" y="-3724155"/>
+            <a:ext cx="15257208" cy="11189825"/>
+          </a:xfrm>
+          <a:prstGeom prst="rect">
+            <a:avLst/>
+          </a:prstGeom>
+        </p:spPr>
+      </p:pic>
+      <p:sp>
+        <p:nvSpPr>
+          <p:cNvPr id="11" name="TextBox 10"/>
+          <p:cNvSpPr txBox="1"/>
+          <p:nvPr/>
+        </p:nvSpPr>
+        <p:spPr>
+          <a:xfrm>
+            <a:off x="486137" y="2531318"/>
+            <a:ext cx="11979797" cy="923330"/>
+          </a:xfrm>
+          <a:prstGeom prst="rect">
+            <a:avLst/>
+          </a:prstGeom>
+          <a:noFill/>
+        </p:spPr>
+        <p:txBody>
+          <a:bodyPr wrap="square" rtlCol="0">
+            <a:spAutoFit/>
+          </a:bodyPr>
+          <a:lstStyle/>
+          <a:p>
+            <a:r>
+              <a:rPr lang="en-US" sz="5400" b="1" dirty="0">
+                <a:solidFill>
+                  <a:srgbClr val="CF3338"/>
+                </a:solidFill>
+                <a:latin typeface="Pragmatica" panose="020B0403040502020204" pitchFamily="34" charset="0"/>
+              </a:rPr>
+              <a:t>Questions?</a:t>
+            </a:r>
+          </a:p>
+        </p:txBody>
+      </p:sp>
+      <p:pic>
+        <p:nvPicPr>
+          <p:cNvPr id="5" name="Picture 4">
+            <a:extLst>
+              <a:ext uri="{FF2B5EF4-FFF2-40B4-BE49-F238E27FC236}">
+                <a16:creationId xmlns:a16="http://schemas.microsoft.com/office/drawing/2014/main" id="{54A06221-5316-4BCF-9FDA-BDB95FF4A778}"/>
+              </a:ext>
+            </a:extLst>
+          </p:cNvPr>
+          <p:cNvPicPr>
+            <a:picLocks noChangeAspect="1"/>
+          </p:cNvPicPr>
+          <p:nvPr/>
+        </p:nvPicPr>
+        <p:blipFill>
+          <a:blip r:embed="rId5">
+            <a:extLst>
+              <a:ext uri="{28A0092B-C50C-407E-A947-70E740481C1C}">
+                <a14:useLocalDpi xmlns:a14="http://schemas.microsoft.com/office/drawing/2010/main" val="0"/>
+              </a:ext>
+            </a:extLst>
+          </a:blip>
+          <a:srcRect/>
+          <a:stretch/>
+        </p:blipFill>
+        <p:spPr>
+          <a:xfrm>
+            <a:off x="12204691" y="3317239"/>
+            <a:ext cx="6083309" cy="6968672"/>
           </a:xfrm>
           <a:prstGeom prst="rect">
             <a:avLst/>
@@ -4684,6 +4580,11 @@
         </p:spPr>
       </p:pic>
     </p:spTree>
+    <p:extLst>
+      <p:ext uri="{BB962C8B-B14F-4D97-AF65-F5344CB8AC3E}">
+        <p14:creationId xmlns:p14="http://schemas.microsoft.com/office/powerpoint/2010/main" val="1689860732"/>
+      </p:ext>
+    </p:extLst>
   </p:cSld>
   <p:clrMapOvr>
     <a:masterClrMapping/>
@@ -4692,79 +4593,93 @@
 </file>
 
 <file path=ppt/slides/slide11.xml><?xml version="1.0" encoding="utf-8"?>
-<p:sld xmlns:a="http://schemas.openxmlformats.org/drawingml/2006/main" xmlns:p="http://schemas.openxmlformats.org/presentationml/2006/main" xmlns:r="http://schemas.openxmlformats.org/officeDocument/2006/relationships">
+<p:sld xmlns:a="http://schemas.openxmlformats.org/drawingml/2006/main" xmlns:r="http://schemas.openxmlformats.org/officeDocument/2006/relationships" xmlns:p="http://schemas.openxmlformats.org/presentationml/2006/main">
   <p:cSld>
     <p:spTree>
       <p:nvGrpSpPr>
-        <p:cNvPr id="1" name=""/>
+        <p:cNvPr id="1" name="">
+          <a:extLst>
+            <a:ext uri="{FF2B5EF4-FFF2-40B4-BE49-F238E27FC236}">
+              <a16:creationId xmlns:a16="http://schemas.microsoft.com/office/drawing/2014/main" id="{2501CF9C-FC7D-DEAE-2D87-10577021DCAD}"/>
+            </a:ext>
+          </a:extLst>
+        </p:cNvPr>
         <p:cNvGrpSpPr/>
         <p:nvPr/>
       </p:nvGrpSpPr>
-      <p:grpSpPr/>
-      <p:sp>
-        <p:nvSpPr>
-          <p:cNvPr id="4" name="Rectangle 3"/>
-          <p:cNvSpPr/>
-          <p:nvPr/>
-        </p:nvSpPr>
-        <p:spPr>
-          <a:xfrm>
-            <a:off x="9861630" y="0"/>
-            <a:ext cx="8426370" cy="10287000"/>
-          </a:xfrm>
-          <a:prstGeom prst="rect">
-            <a:avLst/>
-          </a:prstGeom>
-          <a:solidFill>
-            <a:srgbClr val="CF3338"/>
-          </a:solidFill>
-          <a:ln>
-            <a:noFill/>
-          </a:ln>
-        </p:spPr>
-        <p:style>
-          <a:lnRef idx="2">
-            <a:schemeClr val="accent1">
-              <a:shade val="50000"/>
-            </a:schemeClr>
-          </a:lnRef>
-          <a:fillRef idx="1">
-            <a:schemeClr val="accent1"/>
-          </a:fillRef>
-          <a:effectRef idx="0">
-            <a:schemeClr val="accent1"/>
-          </a:effectRef>
-          <a:fontRef idx="minor">
-            <a:schemeClr val="lt1"/>
-          </a:fontRef>
-        </p:style>
-        <p:txBody>
-          <a:bodyPr rtlCol="0" anchor="ctr"/>
-          <a:lstStyle/>
-          <a:p>
-            <a:pPr algn="ctr"/>
-            <a:endParaRPr lang="en-US" sz="2700"/>
-          </a:p>
-        </p:txBody>
-      </p:sp>
+      <p:grpSpPr>
+        <a:xfrm>
+          <a:off x="0" y="0"/>
+          <a:ext cx="0" cy="0"/>
+          <a:chOff x="0" y="0"/>
+          <a:chExt cx="0" cy="0"/>
+        </a:xfrm>
+      </p:grpSpPr>
       <p:pic>
         <p:nvPicPr>
-          <p:cNvPr id="5" name="Picture 4" descr="image.png"/>
+          <p:cNvPr id="10" name="Picture 9">
+            <a:extLst>
+              <a:ext uri="{FF2B5EF4-FFF2-40B4-BE49-F238E27FC236}">
+                <a16:creationId xmlns:a16="http://schemas.microsoft.com/office/drawing/2014/main" id="{56CBD8B9-A494-A7F7-0F64-845B951EC99F}"/>
+              </a:ext>
+            </a:extLst>
+          </p:cNvPr>
           <p:cNvPicPr>
             <a:picLocks noChangeAspect="1"/>
           </p:cNvPicPr>
           <p:nvPr/>
         </p:nvPicPr>
         <p:blipFill>
-          <a:blip r:embed="rId2"/>
+          <a:blip r:embed="rId3">
+            <a:extLst>
+              <a:ext uri="{28A0092B-C50C-407E-A947-70E740481C1C}">
+                <a14:useLocalDpi xmlns:a14="http://schemas.microsoft.com/office/drawing/2010/main" val="0"/>
+              </a:ext>
+            </a:extLst>
+          </a:blip>
+          <a:srcRect/>
+          <a:stretch/>
+        </p:blipFill>
+        <p:spPr>
+          <a:xfrm>
+            <a:off x="13542796" y="4850092"/>
+            <a:ext cx="4745204" cy="5435819"/>
+          </a:xfrm>
+          <a:prstGeom prst="rect">
+            <a:avLst/>
+          </a:prstGeom>
+        </p:spPr>
+      </p:pic>
+      <p:pic>
+        <p:nvPicPr>
+          <p:cNvPr id="4" name="Picture 3">
+            <a:extLst>
+              <a:ext uri="{FF2B5EF4-FFF2-40B4-BE49-F238E27FC236}">
+                <a16:creationId xmlns:a16="http://schemas.microsoft.com/office/drawing/2014/main" id="{AC63943A-3FAF-22B6-228E-4092BA65ACAF}"/>
+              </a:ext>
+            </a:extLst>
+          </p:cNvPr>
+          <p:cNvPicPr>
+            <a:picLocks noChangeAspect="1"/>
+          </p:cNvPicPr>
+          <p:nvPr/>
+        </p:nvPicPr>
+        <p:blipFill>
+          <a:blip r:embed="rId4">
+            <a:extLst>
+              <a:ext uri="{28A0092B-C50C-407E-A947-70E740481C1C}">
+                <a14:useLocalDpi xmlns:a14="http://schemas.microsoft.com/office/drawing/2010/main" val="0"/>
+              </a:ext>
+            </a:extLst>
+          </a:blip>
           <a:stretch>
             <a:fillRect/>
           </a:stretch>
         </p:blipFill>
         <p:spPr>
           <a:xfrm>
-            <a:off x="15579524" y="7544693"/>
-            <a:ext cx="2708477" cy="2987579"/>
+            <a:off x="-914400" y="-3440159"/>
+            <a:ext cx="15257208" cy="11189825"/>
           </a:xfrm>
           <a:prstGeom prst="rect">
             <a:avLst/>
@@ -4773,14 +4688,20 @@
       </p:pic>
       <p:sp>
         <p:nvSpPr>
-          <p:cNvPr id="3" name="TextBox 2"/>
+          <p:cNvPr id="11" name="TextBox 10">
+            <a:extLst>
+              <a:ext uri="{FF2B5EF4-FFF2-40B4-BE49-F238E27FC236}">
+                <a16:creationId xmlns:a16="http://schemas.microsoft.com/office/drawing/2014/main" id="{5DFCEBB5-9C7D-6182-700C-0428AD2DDE67}"/>
+              </a:ext>
+            </a:extLst>
+          </p:cNvPr>
           <p:cNvSpPr txBox="1"/>
           <p:nvPr/>
         </p:nvSpPr>
         <p:spPr>
           <a:xfrm>
-            <a:off x="260430" y="329879"/>
-            <a:ext cx="9416969" cy="8986434"/>
+            <a:off x="486137" y="2531318"/>
+            <a:ext cx="11979797" cy="923330"/>
           </a:xfrm>
           <a:prstGeom prst="rect">
             <a:avLst/>
@@ -4794,944 +4715,68 @@
           <a:lstStyle/>
           <a:p>
             <a:r>
-              <a:rPr lang="en-US" sz="4400" b="1" dirty="0">
+              <a:rPr lang="en-US" sz="5400" b="1" dirty="0">
                 <a:solidFill>
                   <a:srgbClr val="CF3338"/>
                 </a:solidFill>
                 <a:latin typeface="Pragmatica" panose="020B0403040502020204" pitchFamily="34" charset="0"/>
               </a:rPr>
-              <a:t>Demo 1: Copilot + Style Guide</a:t>
-            </a:r>
-            <a:endParaRPr lang="en-US" sz="4400" dirty="0"/>
-          </a:p>
-          <a:p>
-            <a:pPr>
-              <a:lnSpc>
-                <a:spcPts val="1800"/>
-              </a:lnSpc>
-            </a:pPr>
-            <a:r>
-              <a:rPr lang="en-US" sz="1400" dirty="0">
-                <a:solidFill>
-                  <a:srgbClr val="1F2120"/>
-                </a:solidFill>
-                <a:latin typeface="Arial"/>
-              </a:rPr>
-              <a:t>Workbook: energydata.xlsx (75 rows: Country, Year, Energy Source, Production, Revenue, CO2, ESG)</a:t>
-            </a:r>
-            <a:endParaRPr lang="en-US" sz="1400" dirty="0"/>
-          </a:p>
-          <a:p>
-            <a:pPr>
-              <a:lnSpc>
-                <a:spcPts val="1800"/>
-              </a:lnSpc>
-            </a:pPr>
-            <a:r>
-              <a:rPr lang="en-US" sz="1400" b="1" dirty="0">
-                <a:solidFill>
-                  <a:srgbClr val="1F2120"/>
-                </a:solidFill>
-                <a:latin typeface="Arial"/>
-              </a:rPr>
-              <a:t>Part 1 — Baseline: run basic Copilot prompts with no guidance</a:t>
-            </a:r>
-            <a:endParaRPr lang="en-US" sz="1400" dirty="0"/>
-          </a:p>
-          <a:p>
-            <a:pPr marL="228600" indent="-228600">
-              <a:lnSpc>
-                <a:spcPts val="1800"/>
-              </a:lnSpc>
-              <a:buChar char="•"/>
-            </a:pPr>
-            <a:r>
-              <a:rPr lang="en-US" sz="1400" dirty="0">
-                <a:solidFill>
-                  <a:srgbClr val="1F2120"/>
-                </a:solidFill>
-                <a:latin typeface="Arial"/>
-              </a:rPr>
-              <a:t>Formatting: highlight high-emission rows, add data bars, color by energy source</a:t>
-            </a:r>
-            <a:endParaRPr lang="en-US" sz="1400" dirty="0"/>
-          </a:p>
-          <a:p>
-            <a:pPr marL="228600" indent="-228600">
-              <a:lnSpc>
-                <a:spcPts val="1800"/>
-              </a:lnSpc>
-              <a:buChar char="•"/>
-            </a:pPr>
-            <a:r>
-              <a:rPr lang="en-US" sz="1400" dirty="0">
-                <a:solidFill>
-                  <a:srgbClr val="1F2120"/>
-                </a:solidFill>
-                <a:latin typeface="Arial"/>
-              </a:rPr>
-              <a:t>Calculated columns: Revenue per GWh, Budget Variance, Budget Status</a:t>
-            </a:r>
-            <a:endParaRPr lang="en-US" sz="1400" dirty="0"/>
-          </a:p>
-          <a:p>
-            <a:pPr marL="228600" indent="-228600">
-              <a:lnSpc>
-                <a:spcPts val="1800"/>
-              </a:lnSpc>
-              <a:buChar char="•"/>
-            </a:pPr>
-            <a:r>
-              <a:rPr lang="en-US" sz="1400" dirty="0">
-                <a:solidFill>
-                  <a:srgbClr val="1F2120"/>
-                </a:solidFill>
-                <a:latin typeface="Arial"/>
-              </a:rPr>
-              <a:t>PivotTable + chart: production by country, revenue by source</a:t>
-            </a:r>
-            <a:endParaRPr lang="en-US" sz="1400" dirty="0"/>
-          </a:p>
-          <a:p>
-            <a:pPr marL="228600" indent="-228600">
-              <a:lnSpc>
-                <a:spcPts val="1800"/>
-              </a:lnSpc>
-              <a:buChar char="•"/>
-            </a:pPr>
-            <a:r>
-              <a:rPr lang="en-US" sz="1400" dirty="0">
-                <a:solidFill>
-                  <a:srgbClr val="1F2120"/>
-                </a:solidFill>
-                <a:latin typeface="Arial"/>
-              </a:rPr>
-              <a:t>Formula: explain a SUMPRODUCT and rewrite it with FILTER or LET</a:t>
-            </a:r>
-            <a:endParaRPr lang="en-US" sz="1400" dirty="0"/>
-          </a:p>
-          <a:p>
-            <a:pPr>
-              <a:lnSpc>
-                <a:spcPts val="1800"/>
-              </a:lnSpc>
-            </a:pPr>
-            <a:r>
-              <a:rPr lang="en-US" sz="1400" dirty="0">
-                <a:solidFill>
-                  <a:srgbClr val="1F2120"/>
-                </a:solidFill>
-                <a:latin typeface="Arial"/>
-              </a:rPr>
-              <a:t>Notice what Copilot defaults to: cell refs instead of tables, VLOOKUP, inconsistent charts</a:t>
-            </a:r>
-            <a:endParaRPr lang="en-US" sz="1400" dirty="0"/>
-          </a:p>
-          <a:p>
-            <a:pPr>
-              <a:lnSpc>
-                <a:spcPts val="1800"/>
-              </a:lnSpc>
-            </a:pPr>
-            <a:r>
-              <a:rPr lang="en-US" sz="1400" b="1" dirty="0">
-                <a:solidFill>
-                  <a:srgbClr val="1F2120"/>
-                </a:solidFill>
-                <a:latin typeface="Arial"/>
-              </a:rPr>
-              <a:t>Part 2 — Upload the EITI data viz style guide PDF into Copilot</a:t>
-            </a:r>
-            <a:endParaRPr lang="en-US" sz="1400" dirty="0"/>
-          </a:p>
-          <a:p>
-            <a:pPr marL="228600" indent="-228600">
-              <a:lnSpc>
-                <a:spcPts val="1800"/>
-              </a:lnSpc>
-              <a:buChar char="•"/>
-            </a:pPr>
-            <a:r>
-              <a:rPr lang="en-US" sz="1400" dirty="0">
-                <a:solidFill>
-                  <a:srgbClr val="1F2120"/>
-                </a:solidFill>
-                <a:latin typeface="Arial"/>
-              </a:rPr>
-              <a:t>Setup prompt: use the guide for all chart decisions going forward</a:t>
-            </a:r>
-            <a:endParaRPr lang="en-US" sz="1400" dirty="0"/>
-          </a:p>
-          <a:p>
-            <a:pPr marL="228600" indent="-228600">
-              <a:lnSpc>
-                <a:spcPts val="1800"/>
-              </a:lnSpc>
-              <a:buChar char="•"/>
-            </a:pPr>
-            <a:r>
-              <a:rPr lang="en-US" sz="1400" dirty="0">
-                <a:solidFill>
-                  <a:srgbClr val="1F2120"/>
-                </a:solidFill>
-                <a:latin typeface="Arial"/>
-              </a:rPr>
-              <a:t>Re-run four viz prompts: comparison, composition, correlation, distribution</a:t>
-            </a:r>
-            <a:endParaRPr lang="en-US" sz="1400" dirty="0"/>
-          </a:p>
-          <a:p>
-            <a:pPr marL="228600" indent="-228600">
-              <a:lnSpc>
-                <a:spcPts val="1800"/>
-              </a:lnSpc>
-              <a:buChar char="•"/>
-            </a:pPr>
-            <a:r>
-              <a:rPr lang="en-US" sz="1400" dirty="0">
-                <a:solidFill>
-                  <a:srgbClr val="1F2120"/>
-                </a:solidFill>
-                <a:latin typeface="Arial"/>
-              </a:rPr>
-              <a:t>Copilot now names the chart goal and picks the type the guide recommends</a:t>
-            </a:r>
-            <a:endParaRPr lang="en-US" sz="1400" dirty="0"/>
-          </a:p>
-          <a:p>
-            <a:pPr>
-              <a:lnSpc>
-                <a:spcPts val="1800"/>
-              </a:lnSpc>
-            </a:pPr>
-            <a:r>
-              <a:rPr lang="en-US" sz="1400" dirty="0">
-                <a:solidFill>
-                  <a:srgbClr val="1F2120"/>
-                </a:solidFill>
-                <a:latin typeface="Arial"/>
-              </a:rPr>
-              <a:t>Takeaway: one reference doc turns generic output into reasoned, standards-driven work</a:t>
-            </a:r>
-            <a:endParaRPr lang="en-US" sz="1400" dirty="0"/>
-          </a:p>
-          <a:p>
-            <a:pPr>
-              <a:spcBef>
-                <a:spcPts val="1200"/>
-              </a:spcBef>
-            </a:pPr>
-            <a:r>
-              <a:rPr lang="en-US" sz="2000" dirty="0">
-                <a:solidFill>
-                  <a:srgbClr val="CF3338"/>
-                </a:solidFill>
-                <a:latin typeface="Consolas"/>
-              </a:rPr>
-              <a:t>Folder: 1-data-viz-style-guide</a:t>
-            </a:r>
-            <a:endParaRPr lang="en-US" sz="2000" dirty="0"/>
-          </a:p>
-        </p:txBody>
-      </p:sp>
-    </p:spTree>
-  </p:cSld>
-  <p:clrMapOvr>
-    <a:masterClrMapping/>
-  </p:clrMapOvr>
-</p:sld>
-</file>
-
-<file path=ppt/slides/slide14.xml><?xml version="1.0" encoding="utf-8"?>
-<p:sld xmlns:a="http://schemas.openxmlformats.org/drawingml/2006/main" xmlns:p="http://schemas.openxmlformats.org/presentationml/2006/main" xmlns:r="http://schemas.openxmlformats.org/officeDocument/2006/relationships">
-  <p:cSld>
-    <p:spTree>
-      <p:nvGrpSpPr>
-        <p:cNvPr id="1" name=""/>
-        <p:cNvGrpSpPr/>
-        <p:nvPr/>
-      </p:nvGrpSpPr>
-      <p:grpSpPr/>
-      <p:sp>
-        <p:nvSpPr>
-          <p:cNvPr id="4" name="Rectangle 3"/>
-          <p:cNvSpPr/>
+              <a:t>THANK YOU</a:t>
+            </a:r>
+          </a:p>
+        </p:txBody>
+      </p:sp>
+      <p:sp>
+        <p:nvSpPr>
+          <p:cNvPr id="2" name="AutoShape 2" descr="Home | Full Stack Modeller">
+            <a:extLst>
+              <a:ext uri="{FF2B5EF4-FFF2-40B4-BE49-F238E27FC236}">
+                <a16:creationId xmlns:a16="http://schemas.microsoft.com/office/drawing/2014/main" id="{16E5F1F1-B220-BEC5-B5EA-499D4942916C}"/>
+              </a:ext>
+            </a:extLst>
+          </p:cNvPr>
+          <p:cNvSpPr>
+            <a:spLocks noChangeAspect="1" noChangeArrowheads="1"/>
+          </p:cNvSpPr>
           <p:nvPr/>
         </p:nvSpPr>
-        <p:spPr>
+        <p:spPr bwMode="auto">
           <a:xfrm>
-            <a:off x="9861630" y="0"/>
-            <a:ext cx="8426370" cy="10287000"/>
-          </a:xfrm>
-          <a:prstGeom prst="rect">
-            <a:avLst/>
-          </a:prstGeom>
-          <a:solidFill>
-            <a:srgbClr val="CF3338"/>
-          </a:solidFill>
-          <a:ln>
-            <a:noFill/>
-          </a:ln>
-        </p:spPr>
-        <p:style>
-          <a:lnRef idx="2">
-            <a:schemeClr val="accent1">
-              <a:shade val="50000"/>
-            </a:schemeClr>
-          </a:lnRef>
-          <a:fillRef idx="1">
-            <a:schemeClr val="accent1"/>
-          </a:fillRef>
-          <a:effectRef idx="0">
-            <a:schemeClr val="accent1"/>
-          </a:effectRef>
-          <a:fontRef idx="minor">
-            <a:schemeClr val="lt1"/>
-          </a:fontRef>
-        </p:style>
-        <p:txBody>
-          <a:bodyPr rtlCol="0" anchor="ctr"/>
-          <a:lstStyle/>
-          <a:p>
-            <a:pPr algn="ctr"/>
-            <a:endParaRPr lang="en-US" sz="2700"/>
-          </a:p>
-        </p:txBody>
-      </p:sp>
-      <p:pic>
-        <p:nvPicPr>
-          <p:cNvPr id="5" name="Picture 4" descr="image.png"/>
-          <p:cNvPicPr>
-            <a:picLocks noChangeAspect="1"/>
-          </p:cNvPicPr>
-          <p:nvPr/>
-        </p:nvPicPr>
-        <p:blipFill>
-          <a:blip r:embed="rId2"/>
-          <a:stretch>
-            <a:fillRect/>
-          </a:stretch>
-        </p:blipFill>
-        <p:spPr>
-          <a:xfrm>
-            <a:off x="15579524" y="7544693"/>
-            <a:ext cx="2708477" cy="2987579"/>
-          </a:xfrm>
-          <a:prstGeom prst="rect">
-            <a:avLst/>
-          </a:prstGeom>
-        </p:spPr>
-      </p:pic>
-      <p:sp>
-        <p:nvSpPr>
-          <p:cNvPr id="3" name="TextBox 2"/>
-          <p:cNvSpPr txBox="1"/>
-          <p:nvPr/>
-        </p:nvSpPr>
-        <p:spPr>
-          <a:xfrm>
-            <a:off x="260430" y="329879"/>
-            <a:ext cx="9416969" cy="8986434"/>
+            <a:off x="8991600" y="4991100"/>
+            <a:ext cx="304800" cy="304800"/>
           </a:xfrm>
           <a:prstGeom prst="rect">
             <a:avLst/>
           </a:prstGeom>
           <a:noFill/>
+          <a:extLst>
+            <a:ext uri="{909E8E84-426E-40DD-AFC4-6F175D3DCCD1}">
+              <a14:hiddenFill xmlns:a14="http://schemas.microsoft.com/office/drawing/2010/main">
+                <a:solidFill>
+                  <a:srgbClr val="FFFFFF"/>
+                </a:solidFill>
+              </a14:hiddenFill>
+            </a:ext>
+          </a:extLst>
         </p:spPr>
         <p:txBody>
-          <a:bodyPr wrap="square" rtlCol="0">
-            <a:spAutoFit/>
+          <a:bodyPr vert="horz" wrap="square" lIns="91440" tIns="45720" rIns="91440" bIns="45720" numCol="1" anchor="t" anchorCtr="0" compatLnSpc="1">
+            <a:prstTxWarp prst="textNoShape">
+              <a:avLst/>
+            </a:prstTxWarp>
           </a:bodyPr>
           <a:lstStyle/>
           <a:p>
-            <a:r>
-              <a:rPr lang="en-US" sz="4400" b="1" dirty="0">
-                <a:solidFill>
-                  <a:srgbClr val="CF3338"/>
-                </a:solidFill>
-                <a:latin typeface="Pragmatica" panose="020B0403040502020204" pitchFamily="34" charset="0"/>
-              </a:rPr>
-              <a:t>Demo 2: Copilot vs. Claude</a:t>
-            </a:r>
-            <a:endParaRPr lang="en-US" sz="4400" dirty="0"/>
-          </a:p>
-          <a:p>
-            <a:pPr>
-              <a:lnSpc>
-                <a:spcPts val="1800"/>
-              </a:lnSpc>
-            </a:pPr>
-            <a:r>
-              <a:rPr lang="en-US" sz="1400" dirty="0">
-                <a:solidFill>
-                  <a:srgbClr val="1F2120"/>
-                </a:solidFill>
-                <a:latin typeface="Arial"/>
-              </a:rPr>
-              <a:t>Workbook: Copilot vs Claude Data.xlsx (25 expense rows, two identical sheets)</a:t>
-            </a:r>
-            <a:endParaRPr lang="en-US" sz="1400" dirty="0"/>
-          </a:p>
-          <a:p>
-            <a:pPr>
-              <a:lnSpc>
-                <a:spcPts val="1800"/>
-              </a:lnSpc>
-            </a:pPr>
-            <a:r>
-              <a:rPr lang="en-US" sz="1400" b="1" dirty="0">
-                <a:solidFill>
-                  <a:srgbClr val="1F2120"/>
-                </a:solidFill>
-                <a:latin typeface="Arial"/>
-              </a:rPr>
-              <a:t>Same data, same three prompts, two tools:</a:t>
-            </a:r>
-            <a:endParaRPr lang="en-US" sz="1400" dirty="0"/>
-          </a:p>
-          <a:p>
-            <a:pPr marL="228600" indent="-228600">
-              <a:lnSpc>
-                <a:spcPts val="1800"/>
-              </a:lnSpc>
-              <a:buChar char="•"/>
-            </a:pPr>
-            <a:r>
-              <a:rPr lang="en-US" sz="1400" dirty="0">
-                <a:solidFill>
-                  <a:srgbClr val="1F2120"/>
-                </a:solidFill>
-                <a:latin typeface="Arial"/>
-              </a:rPr>
-              <a:t>Prompt 1: Categorize expenses (Travel, Meals, Office Supplies, Lodging, etc.)</a:t>
-            </a:r>
-            <a:endParaRPr lang="en-US" sz="1400" dirty="0"/>
-          </a:p>
-          <a:p>
-            <a:pPr marL="228600" indent="-228600">
-              <a:lnSpc>
-                <a:spcPts val="1800"/>
-              </a:lnSpc>
-              <a:buChar char="•"/>
-            </a:pPr>
-            <a:r>
-              <a:rPr lang="en-US" sz="1400" dirty="0">
-                <a:solidFill>
-                  <a:srgbClr val="1F2120"/>
-                </a:solidFill>
-                <a:latin typeface="Arial"/>
-              </a:rPr>
-              <a:t>Prompt 2: Summarize spending by Department and Category</a:t>
-            </a:r>
-            <a:endParaRPr lang="en-US" sz="1400" dirty="0"/>
-          </a:p>
-          <a:p>
-            <a:pPr marL="228600" indent="-228600">
-              <a:lnSpc>
-                <a:spcPts val="1800"/>
-              </a:lnSpc>
-              <a:buChar char="•"/>
-            </a:pPr>
-            <a:r>
-              <a:rPr lang="en-US" sz="1400" dirty="0">
-                <a:solidFill>
-                  <a:srgbClr val="1F2120"/>
-                </a:solidFill>
-                <a:latin typeface="Arial"/>
-              </a:rPr>
-              <a:t>Prompt 3: Flag anomalies — duplicates, outliers, miscategorizations</a:t>
-            </a:r>
-            <a:endParaRPr lang="en-US" sz="1400" dirty="0"/>
-          </a:p>
-          <a:p>
-            <a:pPr>
-              <a:lnSpc>
-                <a:spcPts val="1800"/>
-              </a:lnSpc>
-            </a:pPr>
-            <a:r>
-              <a:rPr lang="en-US" sz="1400" dirty="0">
-                <a:solidFill>
-                  <a:srgbClr val="1F2120"/>
-                </a:solidFill>
-                <a:latin typeface="Arial"/>
-              </a:rPr>
-              <a:t>Run on data-copilot sheet with Copilot first, then data-claude with Claude</a:t>
-            </a:r>
-            <a:endParaRPr lang="en-US" sz="1400" dirty="0"/>
-          </a:p>
-          <a:p>
-            <a:pPr>
-              <a:lnSpc>
-                <a:spcPts val="1800"/>
-              </a:lnSpc>
-            </a:pPr>
-            <a:r>
-              <a:rPr lang="en-US" sz="1400" b="1" dirty="0">
-                <a:solidFill>
-                  <a:srgbClr val="1F2120"/>
-                </a:solidFill>
-                <a:latin typeface="Arial"/>
-              </a:rPr>
-              <a:t>What to compare:</a:t>
-            </a:r>
-            <a:endParaRPr lang="en-US" sz="1400" dirty="0"/>
-          </a:p>
-          <a:p>
-            <a:pPr marL="228600" indent="-228600">
-              <a:lnSpc>
-                <a:spcPts val="1800"/>
-              </a:lnSpc>
-              <a:buChar char="•"/>
-            </a:pPr>
-            <a:r>
-              <a:rPr lang="en-US" sz="1400" dirty="0">
-                <a:solidFill>
-                  <a:srgbClr val="1F2120"/>
-                </a:solidFill>
-                <a:latin typeface="Arial"/>
-              </a:rPr>
-              <a:t>Categorization consistency — same labels? Which set would you use?</a:t>
-            </a:r>
-            <a:endParaRPr lang="en-US" sz="1400" dirty="0"/>
-          </a:p>
-          <a:p>
-            <a:pPr marL="228600" indent="-228600">
-              <a:lnSpc>
-                <a:spcPts val="1800"/>
-              </a:lnSpc>
-              <a:buChar char="•"/>
-            </a:pPr>
-            <a:r>
-              <a:rPr lang="en-US" sz="1400" dirty="0">
-                <a:solidFill>
-                  <a:srgbClr val="1F2120"/>
-                </a:solidFill>
-                <a:latin typeface="Arial"/>
-              </a:rPr>
-              <a:t>Where the work lives — Copilot edits in place, Claude gives text you move</a:t>
-            </a:r>
-            <a:endParaRPr lang="en-US" sz="1400" dirty="0"/>
-          </a:p>
-          <a:p>
-            <a:pPr marL="228600" indent="-228600">
-              <a:lnSpc>
-                <a:spcPts val="1800"/>
-              </a:lnSpc>
-              <a:buChar char="•"/>
-            </a:pPr>
-            <a:r>
-              <a:rPr lang="en-US" sz="1400" dirty="0">
-                <a:solidFill>
-                  <a:srgbClr val="1F2120"/>
-                </a:solidFill>
-                <a:latin typeface="Arial"/>
-              </a:rPr>
-              <a:t>Data protection — Copilot in your tenant vs. Claude outside (green shield)</a:t>
-            </a:r>
-            <a:endParaRPr lang="en-US" sz="1400" dirty="0"/>
-          </a:p>
-          <a:p>
-            <a:pPr>
-              <a:lnSpc>
-                <a:spcPts val="1800"/>
-              </a:lnSpc>
-            </a:pPr>
-            <a:r>
-              <a:rPr lang="en-US" sz="1400" dirty="0">
-                <a:solidFill>
-                  <a:srgbClr val="1F2120"/>
-                </a:solidFill>
-                <a:latin typeface="Arial"/>
-              </a:rPr>
-              <a:t>Decision: Copilot for in-Excel work + sensitive data; Claude for deliverables around Excel</a:t>
-            </a:r>
-            <a:endParaRPr lang="en-US" sz="1400" dirty="0"/>
-          </a:p>
-          <a:p>
-            <a:pPr>
-              <a:lnSpc>
-                <a:spcPts val="1800"/>
-              </a:lnSpc>
-            </a:pPr>
-            <a:r>
-              <a:rPr lang="en-US" sz="1400" dirty="0">
-                <a:solidFill>
-                  <a:srgbClr val="1F2120"/>
-                </a:solidFill>
-                <a:latin typeface="Arial"/>
-              </a:rPr>
-              <a:t>Most teams end up with both — learn when to reach for which</a:t>
-            </a:r>
-            <a:endParaRPr lang="en-US" sz="1400" dirty="0"/>
-          </a:p>
-          <a:p>
-            <a:pPr>
-              <a:spcBef>
-                <a:spcPts val="1200"/>
-              </a:spcBef>
-            </a:pPr>
-            <a:r>
-              <a:rPr lang="en-US" sz="2000" dirty="0">
-                <a:solidFill>
-                  <a:srgbClr val="CF3338"/>
-                </a:solidFill>
-                <a:latin typeface="Consolas"/>
-              </a:rPr>
-              <a:t>Folder: 2-claude-vs-copilot</a:t>
-            </a:r>
-            <a:endParaRPr lang="en-US" sz="2000" dirty="0"/>
+            <a:endParaRPr lang="en-US"/>
           </a:p>
         </p:txBody>
       </p:sp>
     </p:spTree>
-  </p:cSld>
-  <p:clrMapOvr>
-    <a:masterClrMapping/>
-  </p:clrMapOvr>
-</p:sld>
-</file>
-
-<file path=ppt/slides/slide17.xml><?xml version="1.0" encoding="utf-8"?>
-<p:sld xmlns:a="http://schemas.openxmlformats.org/drawingml/2006/main" xmlns:p="http://schemas.openxmlformats.org/presentationml/2006/main" xmlns:r="http://schemas.openxmlformats.org/officeDocument/2006/relationships">
-  <p:cSld>
-    <p:spTree>
-      <p:nvGrpSpPr>
-        <p:cNvPr id="1" name=""/>
-        <p:cNvGrpSpPr/>
-        <p:nvPr/>
-      </p:nvGrpSpPr>
-      <p:grpSpPr/>
-      <p:sp>
-        <p:nvSpPr>
-          <p:cNvPr id="4" name="Rectangle 3"/>
-          <p:cNvSpPr/>
-          <p:nvPr/>
-        </p:nvSpPr>
-        <p:spPr>
-          <a:xfrm>
-            <a:off x="9861630" y="0"/>
-            <a:ext cx="8426370" cy="10287000"/>
-          </a:xfrm>
-          <a:prstGeom prst="rect">
-            <a:avLst/>
-          </a:prstGeom>
-          <a:solidFill>
-            <a:srgbClr val="CF3338"/>
-          </a:solidFill>
-          <a:ln>
-            <a:noFill/>
-          </a:ln>
-        </p:spPr>
-        <p:style>
-          <a:lnRef idx="2">
-            <a:schemeClr val="accent1">
-              <a:shade val="50000"/>
-            </a:schemeClr>
-          </a:lnRef>
-          <a:fillRef idx="1">
-            <a:schemeClr val="accent1"/>
-          </a:fillRef>
-          <a:effectRef idx="0">
-            <a:schemeClr val="accent1"/>
-          </a:effectRef>
-          <a:fontRef idx="minor">
-            <a:schemeClr val="lt1"/>
-          </a:fontRef>
-        </p:style>
-        <p:txBody>
-          <a:bodyPr rtlCol="0" anchor="ctr"/>
-          <a:lstStyle/>
-          <a:p>
-            <a:pPr algn="ctr"/>
-            <a:endParaRPr lang="en-US" sz="2700"/>
-          </a:p>
-        </p:txBody>
-      </p:sp>
-      <p:pic>
-        <p:nvPicPr>
-          <p:cNvPr id="5" name="Picture 4" descr="image.png"/>
-          <p:cNvPicPr>
-            <a:picLocks noChangeAspect="1"/>
-          </p:cNvPicPr>
-          <p:nvPr/>
-        </p:nvPicPr>
-        <p:blipFill>
-          <a:blip r:embed="rId2"/>
-          <a:stretch>
-            <a:fillRect/>
-          </a:stretch>
-        </p:blipFill>
-        <p:spPr>
-          <a:xfrm>
-            <a:off x="15579524" y="7544693"/>
-            <a:ext cx="2708477" cy="2987579"/>
-          </a:xfrm>
-          <a:prstGeom prst="rect">
-            <a:avLst/>
-          </a:prstGeom>
-        </p:spPr>
-      </p:pic>
-      <p:sp>
-        <p:nvSpPr>
-          <p:cNvPr id="3" name="TextBox 2"/>
-          <p:cNvSpPr txBox="1"/>
-          <p:nvPr/>
-        </p:nvSpPr>
-        <p:spPr>
-          <a:xfrm>
-            <a:off x="260430" y="329879"/>
-            <a:ext cx="9416969" cy="8986434"/>
-          </a:xfrm>
-          <a:prstGeom prst="rect">
-            <a:avLst/>
-          </a:prstGeom>
-          <a:noFill/>
-        </p:spPr>
-        <p:txBody>
-          <a:bodyPr wrap="square" rtlCol="0">
-            <a:spAutoFit/>
-          </a:bodyPr>
-          <a:lstStyle/>
-          <a:p>
-            <a:r>
-              <a:rPr lang="en-US" sz="4400" b="1" dirty="0">
-                <a:solidFill>
-                  <a:srgbClr val="CF3338"/>
-                </a:solidFill>
-                <a:latin typeface="Pragmatica" panose="020B0403040502020204" pitchFamily="34" charset="0"/>
-              </a:rPr>
-              <a:t>Demo 3: Audit and Change Log</a:t>
-            </a:r>
-            <a:endParaRPr lang="en-US" sz="4400" dirty="0"/>
-          </a:p>
-          <a:p>
-            <a:pPr>
-              <a:lnSpc>
-                <a:spcPts val="1800"/>
-              </a:lnSpc>
-            </a:pPr>
-            <a:r>
-              <a:rPr lang="en-US" sz="1400" dirty="0">
-                <a:solidFill>
-                  <a:srgbClr val="1F2120"/>
-                </a:solidFill>
-                <a:latin typeface="Arial"/>
-              </a:rPr>
-              <a:t>Workbook: copilot-logging-demo.xlsx (Performance sheet: Region, Revenue, Cost)</a:t>
-            </a:r>
-            <a:endParaRPr lang="en-US" sz="1400" dirty="0"/>
-          </a:p>
-          <a:p>
-            <a:pPr>
-              <a:lnSpc>
-                <a:spcPts val="1800"/>
-              </a:lnSpc>
-            </a:pPr>
-            <a:r>
-              <a:rPr lang="en-US" sz="1400" dirty="0">
-                <a:solidFill>
-                  <a:srgbClr val="1F2120"/>
-                </a:solidFill>
-                <a:latin typeface="Arial"/>
-              </a:rPr>
-              <a:t>The problem: Copilot forgets between sessions — no trail of what changed or why</a:t>
-            </a:r>
-            <a:endParaRPr lang="en-US" sz="1400" dirty="0"/>
-          </a:p>
-          <a:p>
-            <a:pPr>
-              <a:lnSpc>
-                <a:spcPts val="1800"/>
-              </a:lnSpc>
-            </a:pPr>
-            <a:r>
-              <a:rPr lang="en-US" sz="1400" dirty="0">
-                <a:solidFill>
-                  <a:srgbClr val="1F2120"/>
-                </a:solidFill>
-                <a:latin typeface="Arial"/>
-              </a:rPr>
-              <a:t>The fix: make the AI log its own work inside the workbook</a:t>
-            </a:r>
-            <a:endParaRPr lang="en-US" sz="1400" dirty="0"/>
-          </a:p>
-          <a:p>
-            <a:pPr>
-              <a:lnSpc>
-                <a:spcPts val="1800"/>
-              </a:lnSpc>
-            </a:pPr>
-            <a:r>
-              <a:rPr lang="en-US" sz="1400" b="1" dirty="0">
-                <a:solidFill>
-                  <a:srgbClr val="1F2120"/>
-                </a:solidFill>
-                <a:latin typeface="Arial"/>
-              </a:rPr>
-              <a:t>Three-prompt pattern:</a:t>
-            </a:r>
-            <a:endParaRPr lang="en-US" sz="1400" dirty="0"/>
-          </a:p>
-          <a:p>
-            <a:pPr marL="228600" indent="-228600">
-              <a:lnSpc>
-                <a:spcPts val="1800"/>
-              </a:lnSpc>
-              <a:buChar char="•"/>
-            </a:pPr>
-            <a:r>
-              <a:rPr lang="en-US" sz="1400" dirty="0">
-                <a:solidFill>
-                  <a:srgbClr val="1F2120"/>
-                </a:solidFill>
-                <a:latin typeface="Arial"/>
-              </a:rPr>
-              <a:t>Prompt 1 (run once): create a Copilot_Log sheet with a CopilotLog table</a:t>
-            </a:r>
-            <a:endParaRPr lang="en-US" sz="1400" dirty="0"/>
-          </a:p>
-          <a:p>
-            <a:pPr marL="228600" indent="-228600">
-              <a:lnSpc>
-                <a:spcPts val="1800"/>
-              </a:lnSpc>
-              <a:buChar char="•"/>
-            </a:pPr>
-            <a:r>
-              <a:rPr lang="en-US" sz="1400" dirty="0">
-                <a:solidFill>
-                  <a:srgbClr val="1F2120"/>
-                </a:solidFill>
-                <a:latin typeface="Arial"/>
-              </a:rPr>
-              <a:t>Prompt 2 (every task): do the work AND add a row to the log</a:t>
-            </a:r>
-            <a:endParaRPr lang="en-US" sz="1400" dirty="0"/>
-          </a:p>
-          <a:p>
-            <a:pPr marL="228600" indent="-228600">
-              <a:lnSpc>
-                <a:spcPts val="1800"/>
-              </a:lnSpc>
-              <a:buChar char="•"/>
-            </a:pPr>
-            <a:r>
-              <a:rPr lang="en-US" sz="1400" dirty="0">
-                <a:solidFill>
-                  <a:srgbClr val="1F2120"/>
-                </a:solidFill>
-                <a:latin typeface="Arial"/>
-              </a:rPr>
-              <a:t>Prompt 3 (on reopen): read the log first, summarize last task, confirm readiness</a:t>
-            </a:r>
-            <a:endParaRPr lang="en-US" sz="1400" dirty="0"/>
-          </a:p>
-          <a:p>
-            <a:pPr>
-              <a:lnSpc>
-                <a:spcPts val="1800"/>
-              </a:lnSpc>
-            </a:pPr>
-            <a:r>
-              <a:rPr lang="en-US" sz="1400" dirty="0">
-                <a:solidFill>
-                  <a:srgbClr val="1F2120"/>
-                </a:solidFill>
-                <a:latin typeface="Arial"/>
-              </a:rPr>
-              <a:t>Live demo: set up log → add Profit + Margin columns → close → reopen → resume</a:t>
-            </a:r>
-            <a:endParaRPr lang="en-US" sz="1400" dirty="0"/>
-          </a:p>
-          <a:p>
-            <a:pPr>
-              <a:lnSpc>
-                <a:spcPts val="1800"/>
-              </a:lnSpc>
-            </a:pPr>
-            <a:r>
-              <a:rPr lang="en-US" sz="1400" dirty="0">
-                <a:solidFill>
-                  <a:srgbClr val="1F2120"/>
-                </a:solidFill>
-                <a:latin typeface="Arial"/>
-              </a:rPr>
-              <a:t>The log lives in the file, not the chat — survives sessions, sharing, and reviewers</a:t>
-            </a:r>
-            <a:endParaRPr lang="en-US" sz="1400" dirty="0"/>
-          </a:p>
-          <a:p>
-            <a:pPr>
-              <a:lnSpc>
-                <a:spcPts val="1800"/>
-              </a:lnSpc>
-            </a:pPr>
-            <a:r>
-              <a:rPr lang="en-US" sz="1400" dirty="0">
-                <a:solidFill>
-                  <a:srgbClr val="1F2120"/>
-                </a:solidFill>
-                <a:latin typeface="Arial"/>
-              </a:rPr>
-              <a:t>This pattern is tool-agnostic: works in Copilot, Claude, or any AI assistant</a:t>
-            </a:r>
-            <a:endParaRPr lang="en-US" sz="1400" dirty="0"/>
-          </a:p>
-          <a:p>
-            <a:pPr>
-              <a:lnSpc>
-                <a:spcPts val="1800"/>
-              </a:lnSpc>
-            </a:pPr>
-            <a:r>
-              <a:rPr lang="en-US" sz="1400" dirty="0">
-                <a:solidFill>
-                  <a:srgbClr val="1F2120"/>
-                </a:solidFill>
-                <a:latin typeface="Arial"/>
-              </a:rPr>
-              <a:t>Pair with a style guide for a workflow you can defend in a review</a:t>
-            </a:r>
-            <a:endParaRPr lang="en-US" sz="1400" dirty="0"/>
-          </a:p>
-          <a:p>
-            <a:pPr>
-              <a:lnSpc>
-                <a:spcPts val="1800"/>
-              </a:lnSpc>
-            </a:pPr>
-            <a:r>
-              <a:rPr lang="en-US" sz="1400" dirty="0">
-                <a:solidFill>
-                  <a:srgbClr val="1F2120"/>
-                </a:solidFill>
-                <a:latin typeface="Arial"/>
-              </a:rPr>
-              <a:t>Handout: Copilot Logging Guide has the full prompt text</a:t>
-            </a:r>
-            <a:endParaRPr lang="en-US" sz="1400" dirty="0"/>
-          </a:p>
-          <a:p>
-            <a:pPr>
-              <a:spcBef>
-                <a:spcPts val="1200"/>
-              </a:spcBef>
-            </a:pPr>
-            <a:r>
-              <a:rPr lang="en-US" sz="2000" dirty="0">
-                <a:solidFill>
-                  <a:srgbClr val="CF3338"/>
-                </a:solidFill>
-                <a:latin typeface="Consolas"/>
-              </a:rPr>
-              <a:t>Folder: 3-audit-log</a:t>
-            </a:r>
-            <a:endParaRPr lang="en-US" sz="2000" dirty="0"/>
-          </a:p>
-        </p:txBody>
-      </p:sp>
-    </p:spTree>
+    <p:extLst>
+      <p:ext uri="{BB962C8B-B14F-4D97-AF65-F5344CB8AC3E}">
+        <p14:creationId xmlns:p14="http://schemas.microsoft.com/office/powerpoint/2010/main" val="709344641"/>
+      </p:ext>
+    </p:extLst>
   </p:cSld>
   <p:clrMapOvr>
     <a:masterClrMapping/>
@@ -5794,7 +4839,7 @@
               <a:rPr lang="en-US" sz="9000">
                 <a:latin typeface="Aliens &amp; cows" panose="00000500000000000000" pitchFamily="2" charset="0"/>
               </a:rPr>
-              <a:t xml:space="preserve">Day 2 </a:t>
+              <a:t>Day 2 </a:t>
             </a:r>
             <a:r>
               <a:rPr lang="en-US" sz="9000" dirty="0">
@@ -6105,7 +5150,7 @@
             </a:r>
             <a:r>
               <a:rPr lang="en-US" sz="3200" dirty="0"/>
-              <a:t xml:space="preserve"> </a:t>
+              <a:t> </a:t>
             </a:r>
           </a:p>
         </p:txBody>
@@ -6211,7 +5256,1119 @@
 </p:sld>
 </file>
 
+<file path=ppt/slides/slide4.xml><?xml version="1.0" encoding="utf-8"?>
+<p:sld xmlns:a="http://schemas.openxmlformats.org/drawingml/2006/main" xmlns:r="http://schemas.openxmlformats.org/officeDocument/2006/relationships" xmlns:p="http://schemas.openxmlformats.org/presentationml/2006/main">
+  <p:cSld>
+    <p:spTree>
+      <p:nvGrpSpPr>
+        <p:cNvPr id="1" name=""/>
+        <p:cNvGrpSpPr/>
+        <p:nvPr/>
+      </p:nvGrpSpPr>
+      <p:grpSpPr>
+        <a:xfrm>
+          <a:off x="0" y="0"/>
+          <a:ext cx="0" cy="0"/>
+          <a:chOff x="0" y="0"/>
+          <a:chExt cx="0" cy="0"/>
+        </a:xfrm>
+      </p:grpSpPr>
+      <p:sp>
+        <p:nvSpPr>
+          <p:cNvPr id="11" name="TextBox 10">
+            <a:extLst>
+              <a:ext uri="{FF2B5EF4-FFF2-40B4-BE49-F238E27FC236}">
+                <a16:creationId xmlns:a16="http://schemas.microsoft.com/office/drawing/2014/main" id="{781603C7-76CD-A76B-F955-68F3329D8967}"/>
+              </a:ext>
+            </a:extLst>
+          </p:cNvPr>
+          <p:cNvSpPr txBox="1"/>
+          <p:nvPr/>
+        </p:nvSpPr>
+        <p:spPr>
+          <a:xfrm>
+            <a:off x="520861" y="170082"/>
+            <a:ext cx="14642939" cy="1107996"/>
+          </a:xfrm>
+          <a:prstGeom prst="rect">
+            <a:avLst/>
+          </a:prstGeom>
+          <a:noFill/>
+        </p:spPr>
+        <p:txBody>
+          <a:bodyPr wrap="square" rtlCol="0">
+            <a:spAutoFit/>
+          </a:bodyPr>
+          <a:lstStyle/>
+          <a:p>
+            <a:r>
+              <a:rPr lang="en-US" sz="6600" dirty="0">
+                <a:latin typeface="Aliens &amp; cows" panose="00000500000000000000" pitchFamily="2" charset="0"/>
+              </a:rPr>
+              <a:t>What Copilot in Excel does today</a:t>
+            </a:r>
+          </a:p>
+        </p:txBody>
+      </p:sp>
+      <p:sp>
+        <p:nvSpPr>
+          <p:cNvPr id="3" name="TextBox 2">
+            <a:extLst>
+              <a:ext uri="{FF2B5EF4-FFF2-40B4-BE49-F238E27FC236}">
+                <a16:creationId xmlns:a16="http://schemas.microsoft.com/office/drawing/2014/main" id="{5F84214C-EACA-355D-FAEB-44DBEAE3040B}"/>
+              </a:ext>
+            </a:extLst>
+          </p:cNvPr>
+          <p:cNvSpPr txBox="1"/>
+          <p:nvPr/>
+        </p:nvSpPr>
+        <p:spPr>
+          <a:xfrm>
+            <a:off x="520861" y="2350000"/>
+            <a:ext cx="14393120" cy="6740307"/>
+          </a:xfrm>
+          <a:prstGeom prst="rect">
+            <a:avLst/>
+          </a:prstGeom>
+          <a:noFill/>
+        </p:spPr>
+        <p:txBody>
+          <a:bodyPr wrap="square" rtlCol="0">
+            <a:spAutoFit/>
+          </a:bodyPr>
+          <a:lstStyle/>
+          <a:p>
+            <a:pPr marL="685800" indent="-685800">
+              <a:buClr>
+                <a:srgbClr val="CF3338"/>
+              </a:buClr>
+              <a:buFont typeface="Arial" panose="020B0604020202020204" pitchFamily="34" charset="0"/>
+              <a:buChar char="•"/>
+            </a:pPr>
+            <a:r>
+              <a:rPr lang="en-US" sz="4800" dirty="0">
+                <a:solidFill>
+                  <a:srgbClr val="707070"/>
+                </a:solidFill>
+                <a:latin typeface="Pragmatica" panose="020B0403040502020204" pitchFamily="34" charset="0"/>
+              </a:rPr>
+              <a:t>Copilot is now the single AI surface inside Excel</a:t>
+            </a:r>
+          </a:p>
+          <a:p>
+            <a:pPr marL="685800" indent="-685800">
+              <a:buClr>
+                <a:srgbClr val="CF3338"/>
+              </a:buClr>
+              <a:buFont typeface="Arial" panose="020B0604020202020204" pitchFamily="34" charset="0"/>
+              <a:buChar char="•"/>
+            </a:pPr>
+            <a:r>
+              <a:rPr lang="en-US" sz="4800" dirty="0">
+                <a:solidFill>
+                  <a:srgbClr val="707070"/>
+                </a:solidFill>
+                <a:latin typeface="Pragmatica" panose="020B0403040502020204" pitchFamily="34" charset="0"/>
+              </a:rPr>
+              <a:t>Advanced Analysis with Python has been folded back into Copilot</a:t>
+            </a:r>
+          </a:p>
+          <a:p>
+            <a:pPr marL="685800" indent="-685800">
+              <a:buClr>
+                <a:srgbClr val="CF3338"/>
+              </a:buClr>
+              <a:buFont typeface="Arial" panose="020B0604020202020204" pitchFamily="34" charset="0"/>
+              <a:buChar char="•"/>
+            </a:pPr>
+            <a:r>
+              <a:rPr lang="en-US" sz="4800" dirty="0">
+                <a:solidFill>
+                  <a:srgbClr val="707070"/>
+                </a:solidFill>
+                <a:latin typeface="Pragmatica" panose="020B0403040502020204" pitchFamily="34" charset="0"/>
+              </a:rPr>
+              <a:t>Agent Mode's multi-step build features now run inside regular Copilot</a:t>
+            </a:r>
+          </a:p>
+          <a:p>
+            <a:pPr marL="685800" indent="-685800">
+              <a:buClr>
+                <a:srgbClr val="CF3338"/>
+              </a:buClr>
+              <a:buFont typeface="Arial" panose="020B0604020202020204" pitchFamily="34" charset="0"/>
+              <a:buChar char="•"/>
+            </a:pPr>
+            <a:r>
+              <a:rPr lang="en-US" sz="4800" dirty="0">
+                <a:solidFill>
+                  <a:srgbClr val="707070"/>
+                </a:solidFill>
+                <a:latin typeface="Pragmatica" panose="020B0403040502020204" pitchFamily="34" charset="0"/>
+              </a:rPr>
+              <a:t>One pane, one subscription, broader reach across your workbook</a:t>
+            </a:r>
+          </a:p>
+          <a:p>
+            <a:pPr marL="685800" indent="-685800">
+              <a:buClr>
+                <a:srgbClr val="CF3338"/>
+              </a:buClr>
+              <a:buFont typeface="Arial" panose="020B0604020202020204" pitchFamily="34" charset="0"/>
+              <a:buChar char="•"/>
+            </a:pPr>
+            <a:r>
+              <a:rPr lang="en-US" sz="4800" dirty="0">
+                <a:solidFill>
+                  <a:srgbClr val="707070"/>
+                </a:solidFill>
+                <a:latin typeface="Pragmatica" panose="020B0403040502020204" pitchFamily="34" charset="0"/>
+              </a:rPr>
+              <a:t>Our job today: use it with confidence, not just convenience</a:t>
+            </a:r>
+          </a:p>
+        </p:txBody>
+      </p:sp>
+      <p:pic>
+        <p:nvPicPr>
+          <p:cNvPr id="15" name="Picture 14" descr="A close up of a sign  Description automatically generated">
+            <a:extLst>
+              <a:ext uri="{FF2B5EF4-FFF2-40B4-BE49-F238E27FC236}">
+                <a16:creationId xmlns:a16="http://schemas.microsoft.com/office/drawing/2014/main" id="{6959BD9D-5738-BA78-737D-3115164D42C1}"/>
+              </a:ext>
+            </a:extLst>
+          </p:cNvPr>
+          <p:cNvPicPr>
+            <a:picLocks noChangeAspect="1"/>
+          </p:cNvPicPr>
+          <p:nvPr/>
+        </p:nvPicPr>
+        <p:blipFill>
+          <a:blip r:embed="rId3">
+            <a:extLst>
+              <a:ext uri="{28A0092B-C50C-407E-A947-70E740481C1C}">
+                <a14:useLocalDpi xmlns:a14="http://schemas.microsoft.com/office/drawing/2010/main" val="0"/>
+              </a:ext>
+            </a:extLst>
+          </a:blip>
+          <a:stretch>
+            <a:fillRect/>
+          </a:stretch>
+        </p:blipFill>
+        <p:spPr>
+          <a:xfrm>
+            <a:off x="16341036" y="8058429"/>
+            <a:ext cx="1942857" cy="2228571"/>
+          </a:xfrm>
+          <a:prstGeom prst="rect">
+            <a:avLst/>
+          </a:prstGeom>
+        </p:spPr>
+      </p:pic>
+    </p:spTree>
+  </p:cSld>
+  <p:clrMapOvr>
+    <a:masterClrMapping/>
+  </p:clrMapOvr>
+</p:sld>
+</file>
+
 <file path=ppt/slides/slide5.xml><?xml version="1.0" encoding="utf-8"?>
+<p:sld xmlns:a="http://schemas.openxmlformats.org/drawingml/2006/main" xmlns:r="http://schemas.openxmlformats.org/officeDocument/2006/relationships" xmlns:p="http://schemas.openxmlformats.org/presentationml/2006/main">
+  <p:cSld>
+    <p:spTree>
+      <p:nvGrpSpPr>
+        <p:cNvPr id="1" name=""/>
+        <p:cNvGrpSpPr/>
+        <p:nvPr/>
+      </p:nvGrpSpPr>
+      <p:grpSpPr>
+        <a:xfrm>
+          <a:off x="0" y="0"/>
+          <a:ext cx="0" cy="0"/>
+          <a:chOff x="0" y="0"/>
+          <a:chExt cx="0" cy="0"/>
+        </a:xfrm>
+      </p:grpSpPr>
+      <p:sp>
+        <p:nvSpPr>
+          <p:cNvPr id="4" name="Rectangle 3"/>
+          <p:cNvSpPr/>
+          <p:nvPr/>
+        </p:nvSpPr>
+        <p:spPr>
+          <a:xfrm>
+            <a:off x="9861630" y="0"/>
+            <a:ext cx="8426370" cy="10287000"/>
+          </a:xfrm>
+          <a:prstGeom prst="rect">
+            <a:avLst/>
+          </a:prstGeom>
+          <a:solidFill>
+            <a:srgbClr val="CF3338"/>
+          </a:solidFill>
+          <a:ln>
+            <a:noFill/>
+          </a:ln>
+        </p:spPr>
+        <p:style>
+          <a:lnRef idx="2">
+            <a:schemeClr val="accent1">
+              <a:shade val="50000"/>
+            </a:schemeClr>
+          </a:lnRef>
+          <a:fillRef idx="1">
+            <a:schemeClr val="accent1"/>
+          </a:fillRef>
+          <a:effectRef idx="0">
+            <a:schemeClr val="accent1"/>
+          </a:effectRef>
+          <a:fontRef idx="minor">
+            <a:schemeClr val="lt1"/>
+          </a:fontRef>
+        </p:style>
+        <p:txBody>
+          <a:bodyPr rtlCol="0" anchor="ctr"/>
+          <a:lstStyle/>
+          <a:p>
+            <a:pPr algn="ctr"/>
+            <a:endParaRPr lang="en-US" sz="2700"/>
+          </a:p>
+        </p:txBody>
+      </p:sp>
+      <p:pic>
+        <p:nvPicPr>
+          <p:cNvPr id="5" name="Picture 4" descr="image.png"/>
+          <p:cNvPicPr>
+            <a:picLocks noChangeAspect="1"/>
+          </p:cNvPicPr>
+          <p:nvPr/>
+        </p:nvPicPr>
+        <p:blipFill>
+          <a:blip r:embed="rId3"/>
+          <a:stretch>
+            <a:fillRect/>
+          </a:stretch>
+        </p:blipFill>
+        <p:spPr>
+          <a:xfrm>
+            <a:off x="15579524" y="7544693"/>
+            <a:ext cx="2708477" cy="2987579"/>
+          </a:xfrm>
+          <a:prstGeom prst="rect">
+            <a:avLst/>
+          </a:prstGeom>
+        </p:spPr>
+      </p:pic>
+      <p:sp>
+        <p:nvSpPr>
+          <p:cNvPr id="3" name="TextBox 2"/>
+          <p:cNvSpPr txBox="1"/>
+          <p:nvPr/>
+        </p:nvSpPr>
+        <p:spPr>
+          <a:xfrm>
+            <a:off x="260430" y="329879"/>
+            <a:ext cx="9416969" cy="9510296"/>
+          </a:xfrm>
+          <a:prstGeom prst="rect">
+            <a:avLst/>
+          </a:prstGeom>
+          <a:noFill/>
+        </p:spPr>
+        <p:txBody>
+          <a:bodyPr wrap="square" rtlCol="0">
+            <a:spAutoFit/>
+          </a:bodyPr>
+          <a:lstStyle/>
+          <a:p>
+            <a:r>
+              <a:rPr lang="en-US" sz="4400" b="1" dirty="0">
+                <a:solidFill>
+                  <a:srgbClr val="CF3338"/>
+                </a:solidFill>
+                <a:latin typeface="Pragmatica" panose="020B0403040502020204" pitchFamily="34" charset="0"/>
+              </a:rPr>
+              <a:t>Demo 1: Copilot basics + Style Guide</a:t>
+            </a:r>
+          </a:p>
+          <a:p>
+            <a:endParaRPr lang="en-US" sz="4400" b="1" dirty="0">
+              <a:solidFill>
+                <a:srgbClr val="CF3338"/>
+              </a:solidFill>
+              <a:latin typeface="Pragmatica" panose="020B0403040502020204" pitchFamily="34" charset="0"/>
+            </a:endParaRPr>
+          </a:p>
+          <a:p>
+            <a:r>
+              <a:rPr lang="en-US" sz="4000" b="1" dirty="0">
+                <a:solidFill>
+                  <a:srgbClr val="CF3338"/>
+                </a:solidFill>
+              </a:rPr>
+              <a:t>Workbook:</a:t>
+            </a:r>
+            <a:r>
+              <a:rPr lang="en-US" sz="4000" dirty="0">
+                <a:solidFill>
+                  <a:srgbClr val="CF3338"/>
+                </a:solidFill>
+              </a:rPr>
+              <a:t> energydata.xlsx (75 rows)</a:t>
+            </a:r>
+          </a:p>
+          <a:p>
+            <a:endParaRPr lang="en-US" sz="4000" dirty="0">
+              <a:solidFill>
+                <a:srgbClr val="CF3338"/>
+              </a:solidFill>
+            </a:endParaRPr>
+          </a:p>
+          <a:p>
+            <a:r>
+              <a:rPr lang="en-US" sz="4000" b="1" dirty="0">
+                <a:solidFill>
+                  <a:srgbClr val="CF3338"/>
+                </a:solidFill>
+              </a:rPr>
+              <a:t>Part 1: Baseline</a:t>
+            </a:r>
+            <a:endParaRPr lang="en-US" sz="4000" dirty="0">
+              <a:solidFill>
+                <a:srgbClr val="CF3338"/>
+              </a:solidFill>
+            </a:endParaRPr>
+          </a:p>
+          <a:p>
+            <a:pPr marL="571500" indent="-571500">
+              <a:buFont typeface="Arial" panose="020B0604020202020204" pitchFamily="34" charset="0"/>
+              <a:buChar char="•"/>
+            </a:pPr>
+            <a:r>
+              <a:rPr lang="en-US" sz="4000" dirty="0">
+                <a:solidFill>
+                  <a:srgbClr val="CF3338"/>
+                </a:solidFill>
+              </a:rPr>
+              <a:t>Formatting, calc columns, Pivot + charts </a:t>
+            </a:r>
+          </a:p>
+          <a:p>
+            <a:pPr marL="571500" indent="-571500">
+              <a:buFont typeface="Arial" panose="020B0604020202020204" pitchFamily="34" charset="0"/>
+              <a:buChar char="•"/>
+            </a:pPr>
+            <a:r>
+              <a:rPr lang="en-US" sz="4000" dirty="0">
+                <a:solidFill>
+                  <a:srgbClr val="CF3338"/>
+                </a:solidFill>
+              </a:rPr>
+              <a:t>SUMPRODUCT → FILTER/LET </a:t>
+            </a:r>
+          </a:p>
+          <a:p>
+            <a:pPr marL="571500" indent="-571500">
+              <a:buFont typeface="Arial" panose="020B0604020202020204" pitchFamily="34" charset="0"/>
+              <a:buChar char="•"/>
+            </a:pPr>
+            <a:r>
+              <a:rPr lang="en-US" sz="4000" dirty="0">
+                <a:solidFill>
+                  <a:srgbClr val="CF3338"/>
+                </a:solidFill>
+              </a:rPr>
+              <a:t>Defaults: cell refs, VLOOKUP, messy charts</a:t>
+            </a:r>
+          </a:p>
+          <a:p>
+            <a:r>
+              <a:rPr lang="en-US" sz="4000" dirty="0">
+                <a:solidFill>
+                  <a:srgbClr val="CF3338"/>
+                </a:solidFill>
+              </a:rPr>
+              <a:t> </a:t>
+            </a:r>
+          </a:p>
+          <a:p>
+            <a:r>
+              <a:rPr lang="en-US" sz="4000" b="1" dirty="0">
+                <a:solidFill>
+                  <a:srgbClr val="CF3338"/>
+                </a:solidFill>
+              </a:rPr>
+              <a:t>Part 2: Style Guide (EITI)</a:t>
+            </a:r>
+            <a:endParaRPr lang="en-US" sz="4000" dirty="0">
+              <a:solidFill>
+                <a:srgbClr val="CF3338"/>
+              </a:solidFill>
+            </a:endParaRPr>
+          </a:p>
+          <a:p>
+            <a:pPr marL="571500" indent="-571500">
+              <a:buFont typeface="Arial" panose="020B0604020202020204" pitchFamily="34" charset="0"/>
+              <a:buChar char="•"/>
+            </a:pPr>
+            <a:r>
+              <a:rPr lang="en-US" sz="4000" dirty="0">
+                <a:solidFill>
+                  <a:srgbClr val="CF3338"/>
+                </a:solidFill>
+              </a:rPr>
+              <a:t>Apply guide → re-run 4 viz types </a:t>
+            </a:r>
+          </a:p>
+          <a:p>
+            <a:pPr marL="571500" indent="-571500">
+              <a:buFont typeface="Arial" panose="020B0604020202020204" pitchFamily="34" charset="0"/>
+              <a:buChar char="•"/>
+            </a:pPr>
+            <a:r>
+              <a:rPr lang="en-US" sz="4000" dirty="0">
+                <a:solidFill>
+                  <a:srgbClr val="CF3338"/>
+                </a:solidFill>
+              </a:rPr>
+              <a:t>Charts align to clear goals </a:t>
+            </a:r>
+          </a:p>
+          <a:p>
+            <a:endParaRPr lang="en-US" sz="4000" dirty="0">
+              <a:solidFill>
+                <a:srgbClr val="CF3338"/>
+              </a:solidFill>
+            </a:endParaRPr>
+          </a:p>
+          <a:p>
+            <a:r>
+              <a:rPr lang="en-US" sz="4000" b="1" dirty="0">
+                <a:solidFill>
+                  <a:srgbClr val="CF3338"/>
+                </a:solidFill>
+              </a:rPr>
+              <a:t>Takeaway:</a:t>
+            </a:r>
+            <a:r>
+              <a:rPr lang="en-US" sz="4000" dirty="0">
+                <a:solidFill>
+                  <a:srgbClr val="CF3338"/>
+                </a:solidFill>
+              </a:rPr>
+              <a:t> reference doc → better outputs</a:t>
+            </a:r>
+          </a:p>
+          <a:p>
+            <a:endParaRPr lang="en-US" sz="4400" b="1" dirty="0">
+              <a:solidFill>
+                <a:srgbClr val="CF3338"/>
+              </a:solidFill>
+              <a:latin typeface="Pragmatica" panose="020B0403040502020204" pitchFamily="34" charset="0"/>
+            </a:endParaRPr>
+          </a:p>
+        </p:txBody>
+      </p:sp>
+    </p:spTree>
+  </p:cSld>
+  <p:clrMapOvr>
+    <a:masterClrMapping/>
+  </p:clrMapOvr>
+</p:sld>
+</file>
+
+<file path=ppt/slides/slide6.xml><?xml version="1.0" encoding="utf-8"?>
+<p:sld xmlns:a="http://schemas.openxmlformats.org/drawingml/2006/main" xmlns:r="http://schemas.openxmlformats.org/officeDocument/2006/relationships" xmlns:p="http://schemas.openxmlformats.org/presentationml/2006/main">
+  <p:cSld>
+    <p:spTree>
+      <p:nvGrpSpPr>
+        <p:cNvPr id="1" name=""/>
+        <p:cNvGrpSpPr/>
+        <p:nvPr/>
+      </p:nvGrpSpPr>
+      <p:grpSpPr>
+        <a:xfrm>
+          <a:off x="0" y="0"/>
+          <a:ext cx="0" cy="0"/>
+          <a:chOff x="0" y="0"/>
+          <a:chExt cx="0" cy="0"/>
+        </a:xfrm>
+      </p:grpSpPr>
+      <p:sp>
+        <p:nvSpPr>
+          <p:cNvPr id="4" name="Rectangle 3"/>
+          <p:cNvSpPr/>
+          <p:nvPr/>
+        </p:nvSpPr>
+        <p:spPr>
+          <a:xfrm>
+            <a:off x="9861630" y="0"/>
+            <a:ext cx="8426370" cy="10287000"/>
+          </a:xfrm>
+          <a:prstGeom prst="rect">
+            <a:avLst/>
+          </a:prstGeom>
+          <a:solidFill>
+            <a:srgbClr val="CF3338"/>
+          </a:solidFill>
+          <a:ln>
+            <a:noFill/>
+          </a:ln>
+        </p:spPr>
+        <p:style>
+          <a:lnRef idx="2">
+            <a:schemeClr val="accent1">
+              <a:shade val="50000"/>
+            </a:schemeClr>
+          </a:lnRef>
+          <a:fillRef idx="1">
+            <a:schemeClr val="accent1"/>
+          </a:fillRef>
+          <a:effectRef idx="0">
+            <a:schemeClr val="accent1"/>
+          </a:effectRef>
+          <a:fontRef idx="minor">
+            <a:schemeClr val="lt1"/>
+          </a:fontRef>
+        </p:style>
+        <p:txBody>
+          <a:bodyPr rtlCol="0" anchor="ctr"/>
+          <a:lstStyle/>
+          <a:p>
+            <a:pPr algn="ctr"/>
+            <a:endParaRPr lang="en-US" sz="2700"/>
+          </a:p>
+        </p:txBody>
+      </p:sp>
+      <p:pic>
+        <p:nvPicPr>
+          <p:cNvPr id="5" name="Picture 4" descr="image.png"/>
+          <p:cNvPicPr>
+            <a:picLocks noChangeAspect="1"/>
+          </p:cNvPicPr>
+          <p:nvPr/>
+        </p:nvPicPr>
+        <p:blipFill>
+          <a:blip r:embed="rId3"/>
+          <a:stretch>
+            <a:fillRect/>
+          </a:stretch>
+        </p:blipFill>
+        <p:spPr>
+          <a:xfrm>
+            <a:off x="15579524" y="7544693"/>
+            <a:ext cx="2708477" cy="2987579"/>
+          </a:xfrm>
+          <a:prstGeom prst="rect">
+            <a:avLst/>
+          </a:prstGeom>
+        </p:spPr>
+      </p:pic>
+      <p:sp>
+        <p:nvSpPr>
+          <p:cNvPr id="3" name="TextBox 2"/>
+          <p:cNvSpPr txBox="1"/>
+          <p:nvPr/>
+        </p:nvSpPr>
+        <p:spPr>
+          <a:xfrm>
+            <a:off x="260430" y="329879"/>
+            <a:ext cx="9416969" cy="10248960"/>
+          </a:xfrm>
+          <a:prstGeom prst="rect">
+            <a:avLst/>
+          </a:prstGeom>
+          <a:noFill/>
+        </p:spPr>
+        <p:txBody>
+          <a:bodyPr wrap="square" rtlCol="0">
+            <a:spAutoFit/>
+          </a:bodyPr>
+          <a:lstStyle/>
+          <a:p>
+            <a:r>
+              <a:rPr lang="en-US" sz="4400" b="1" dirty="0">
+                <a:solidFill>
+                  <a:srgbClr val="CF3338"/>
+                </a:solidFill>
+                <a:latin typeface="Pragmatica" panose="020B0403040502020204" pitchFamily="34" charset="0"/>
+              </a:rPr>
+              <a:t>Demo 2: Copilot vs. Claude</a:t>
+            </a:r>
+          </a:p>
+          <a:p>
+            <a:r>
+              <a:rPr lang="en-US" sz="4400" i="1" dirty="0">
+                <a:solidFill>
+                  <a:srgbClr val="CF3338"/>
+                </a:solidFill>
+                <a:latin typeface="Pragmatica" panose="020B0403040502020204" pitchFamily="34" charset="0"/>
+              </a:rPr>
+              <a:t>C</a:t>
+            </a:r>
+            <a:r>
+              <a:rPr lang="en-US" sz="4400" i="1" dirty="0">
+                <a:solidFill>
+                  <a:srgbClr val="CF3338"/>
+                </a:solidFill>
+              </a:rPr>
+              <a:t>ategorize, summarize, flag anomalies </a:t>
+            </a:r>
+          </a:p>
+          <a:p>
+            <a:endParaRPr lang="en-US" sz="4400" b="1" dirty="0">
+              <a:solidFill>
+                <a:srgbClr val="CF3338"/>
+              </a:solidFill>
+            </a:endParaRPr>
+          </a:p>
+          <a:p>
+            <a:r>
+              <a:rPr lang="en-US" sz="4400" b="1" dirty="0">
+                <a:solidFill>
+                  <a:srgbClr val="CF3338"/>
+                </a:solidFill>
+              </a:rPr>
+              <a:t>Compare: </a:t>
+            </a:r>
+          </a:p>
+          <a:p>
+            <a:pPr marL="571500" indent="-571500">
+              <a:buFont typeface="Arial" panose="020B0604020202020204" pitchFamily="34" charset="0"/>
+              <a:buChar char="•"/>
+            </a:pPr>
+            <a:r>
+              <a:rPr lang="en-US" sz="4400" dirty="0">
+                <a:solidFill>
+                  <a:srgbClr val="CF3338"/>
+                </a:solidFill>
+              </a:rPr>
+              <a:t>Consistency</a:t>
+            </a:r>
+          </a:p>
+          <a:p>
+            <a:pPr marL="571500" indent="-571500">
+              <a:buFont typeface="Arial" panose="020B0604020202020204" pitchFamily="34" charset="0"/>
+              <a:buChar char="•"/>
+            </a:pPr>
+            <a:r>
+              <a:rPr lang="en-US" sz="4400" dirty="0">
+                <a:solidFill>
+                  <a:srgbClr val="CF3338"/>
+                </a:solidFill>
+              </a:rPr>
+              <a:t>Where work lives</a:t>
+            </a:r>
+          </a:p>
+          <a:p>
+            <a:pPr marL="571500" indent="-571500">
+              <a:buFont typeface="Arial" panose="020B0604020202020204" pitchFamily="34" charset="0"/>
+              <a:buChar char="•"/>
+            </a:pPr>
+            <a:r>
+              <a:rPr lang="en-US" sz="4400" dirty="0">
+                <a:solidFill>
+                  <a:srgbClr val="CF3338"/>
+                </a:solidFill>
+              </a:rPr>
+              <a:t>Data security </a:t>
+            </a:r>
+          </a:p>
+          <a:p>
+            <a:endParaRPr lang="en-US" sz="4400" dirty="0">
+              <a:solidFill>
+                <a:srgbClr val="CF3338"/>
+              </a:solidFill>
+            </a:endParaRPr>
+          </a:p>
+          <a:p>
+            <a:r>
+              <a:rPr lang="en-US" sz="4400" b="1" dirty="0">
+                <a:solidFill>
+                  <a:srgbClr val="CF3338"/>
+                </a:solidFill>
+              </a:rPr>
+              <a:t>Decision</a:t>
+            </a:r>
+            <a:endParaRPr lang="en-US" sz="4400" dirty="0">
+              <a:solidFill>
+                <a:srgbClr val="CF3338"/>
+              </a:solidFill>
+            </a:endParaRPr>
+          </a:p>
+          <a:p>
+            <a:pPr marL="571500" indent="-571500">
+              <a:buFont typeface="Arial" panose="020B0604020202020204" pitchFamily="34" charset="0"/>
+              <a:buChar char="•"/>
+            </a:pPr>
+            <a:r>
+              <a:rPr lang="en-US" sz="4400" dirty="0">
+                <a:solidFill>
+                  <a:srgbClr val="CF3338"/>
+                </a:solidFill>
+              </a:rPr>
+              <a:t>Copilot: in-Excel + sensitive </a:t>
+            </a:r>
+          </a:p>
+          <a:p>
+            <a:pPr marL="571500" indent="-571500">
+              <a:buFont typeface="Arial" panose="020B0604020202020204" pitchFamily="34" charset="0"/>
+              <a:buChar char="•"/>
+            </a:pPr>
+            <a:r>
+              <a:rPr lang="en-US" sz="4400" dirty="0">
+                <a:solidFill>
+                  <a:srgbClr val="CF3338"/>
+                </a:solidFill>
+              </a:rPr>
+              <a:t>Claude: deliverables </a:t>
+            </a:r>
+          </a:p>
+          <a:p>
+            <a:endParaRPr lang="en-US" sz="4400" dirty="0">
+              <a:solidFill>
+                <a:srgbClr val="CF3338"/>
+              </a:solidFill>
+            </a:endParaRPr>
+          </a:p>
+          <a:p>
+            <a:r>
+              <a:rPr lang="en-US" sz="4400" b="1" dirty="0">
+                <a:solidFill>
+                  <a:srgbClr val="CF3338"/>
+                </a:solidFill>
+              </a:rPr>
+              <a:t>Takeaway:</a:t>
+            </a:r>
+            <a:r>
+              <a:rPr lang="en-US" sz="4400" dirty="0">
+                <a:solidFill>
+                  <a:srgbClr val="CF3338"/>
+                </a:solidFill>
+              </a:rPr>
+              <a:t> use both wisely</a:t>
+            </a:r>
+          </a:p>
+          <a:p>
+            <a:r>
+              <a:rPr lang="en-US" sz="4400" dirty="0">
+                <a:solidFill>
+                  <a:srgbClr val="CF3338"/>
+                </a:solidFill>
+              </a:rPr>
+              <a:t>Folder: 2-claude-vs-copilot</a:t>
+            </a:r>
+          </a:p>
+          <a:p>
+            <a:endParaRPr lang="en-US" sz="4400" dirty="0"/>
+          </a:p>
+        </p:txBody>
+      </p:sp>
+    </p:spTree>
+  </p:cSld>
+  <p:clrMapOvr>
+    <a:masterClrMapping/>
+  </p:clrMapOvr>
+</p:sld>
+</file>
+
+<file path=ppt/slides/slide7.xml><?xml version="1.0" encoding="utf-8"?>
+<p:sld xmlns:a="http://schemas.openxmlformats.org/drawingml/2006/main" xmlns:r="http://schemas.openxmlformats.org/officeDocument/2006/relationships" xmlns:p="http://schemas.openxmlformats.org/presentationml/2006/main">
+  <p:cSld>
+    <p:spTree>
+      <p:nvGrpSpPr>
+        <p:cNvPr id="1" name=""/>
+        <p:cNvGrpSpPr/>
+        <p:nvPr/>
+      </p:nvGrpSpPr>
+      <p:grpSpPr>
+        <a:xfrm>
+          <a:off x="0" y="0"/>
+          <a:ext cx="0" cy="0"/>
+          <a:chOff x="0" y="0"/>
+          <a:chExt cx="0" cy="0"/>
+        </a:xfrm>
+      </p:grpSpPr>
+      <p:sp>
+        <p:nvSpPr>
+          <p:cNvPr id="4" name="Rectangle 3"/>
+          <p:cNvSpPr/>
+          <p:nvPr/>
+        </p:nvSpPr>
+        <p:spPr>
+          <a:xfrm>
+            <a:off x="9861630" y="0"/>
+            <a:ext cx="8426370" cy="10287000"/>
+          </a:xfrm>
+          <a:prstGeom prst="rect">
+            <a:avLst/>
+          </a:prstGeom>
+          <a:solidFill>
+            <a:srgbClr val="CF3338"/>
+          </a:solidFill>
+          <a:ln>
+            <a:noFill/>
+          </a:ln>
+        </p:spPr>
+        <p:style>
+          <a:lnRef idx="2">
+            <a:schemeClr val="accent1">
+              <a:shade val="50000"/>
+            </a:schemeClr>
+          </a:lnRef>
+          <a:fillRef idx="1">
+            <a:schemeClr val="accent1"/>
+          </a:fillRef>
+          <a:effectRef idx="0">
+            <a:schemeClr val="accent1"/>
+          </a:effectRef>
+          <a:fontRef idx="minor">
+            <a:schemeClr val="lt1"/>
+          </a:fontRef>
+        </p:style>
+        <p:txBody>
+          <a:bodyPr rtlCol="0" anchor="ctr"/>
+          <a:lstStyle/>
+          <a:p>
+            <a:pPr algn="ctr"/>
+            <a:endParaRPr lang="en-US" sz="2700"/>
+          </a:p>
+        </p:txBody>
+      </p:sp>
+      <p:pic>
+        <p:nvPicPr>
+          <p:cNvPr id="5" name="Picture 4" descr="image.png"/>
+          <p:cNvPicPr>
+            <a:picLocks noChangeAspect="1"/>
+          </p:cNvPicPr>
+          <p:nvPr/>
+        </p:nvPicPr>
+        <p:blipFill>
+          <a:blip r:embed="rId3"/>
+          <a:stretch>
+            <a:fillRect/>
+          </a:stretch>
+        </p:blipFill>
+        <p:spPr>
+          <a:xfrm>
+            <a:off x="15579524" y="7544693"/>
+            <a:ext cx="2708477" cy="2987579"/>
+          </a:xfrm>
+          <a:prstGeom prst="rect">
+            <a:avLst/>
+          </a:prstGeom>
+        </p:spPr>
+      </p:pic>
+      <p:sp>
+        <p:nvSpPr>
+          <p:cNvPr id="3" name="TextBox 2"/>
+          <p:cNvSpPr txBox="1"/>
+          <p:nvPr/>
+        </p:nvSpPr>
+        <p:spPr>
+          <a:xfrm>
+            <a:off x="260430" y="329879"/>
+            <a:ext cx="9416969" cy="8217634"/>
+          </a:xfrm>
+          <a:prstGeom prst="rect">
+            <a:avLst/>
+          </a:prstGeom>
+          <a:noFill/>
+        </p:spPr>
+        <p:txBody>
+          <a:bodyPr wrap="square" rtlCol="0">
+            <a:spAutoFit/>
+          </a:bodyPr>
+          <a:lstStyle/>
+          <a:p>
+            <a:r>
+              <a:rPr lang="en-US" sz="4400" b="1" dirty="0">
+                <a:solidFill>
+                  <a:srgbClr val="CF3338"/>
+                </a:solidFill>
+                <a:latin typeface="Pragmatica" panose="020B0403040502020204" pitchFamily="34" charset="0"/>
+              </a:rPr>
+              <a:t>Demo 3: Audit and Change Log</a:t>
+            </a:r>
+          </a:p>
+          <a:p>
+            <a:endParaRPr lang="en-US" sz="4400" b="1" dirty="0">
+              <a:solidFill>
+                <a:srgbClr val="CF3338"/>
+              </a:solidFill>
+              <a:latin typeface="Pragmatica" panose="020B0403040502020204" pitchFamily="34" charset="0"/>
+            </a:endParaRPr>
+          </a:p>
+          <a:p>
+            <a:r>
+              <a:rPr lang="en-US" sz="4000" b="1" dirty="0">
+                <a:solidFill>
+                  <a:srgbClr val="CF3338"/>
+                </a:solidFill>
+              </a:rPr>
+              <a:t>Problem → Fix</a:t>
+            </a:r>
+            <a:endParaRPr lang="en-US" sz="4000" dirty="0">
+              <a:solidFill>
+                <a:srgbClr val="CF3338"/>
+              </a:solidFill>
+            </a:endParaRPr>
+          </a:p>
+          <a:p>
+            <a:pPr marL="571500" indent="-571500">
+              <a:buFont typeface="Arial" panose="020B0604020202020204" pitchFamily="34" charset="0"/>
+              <a:buChar char="•"/>
+            </a:pPr>
+            <a:r>
+              <a:rPr lang="en-US" sz="4000" dirty="0">
+                <a:solidFill>
+                  <a:srgbClr val="CF3338"/>
+                </a:solidFill>
+              </a:rPr>
+              <a:t>Copilot forgets → no audit trail </a:t>
+            </a:r>
+          </a:p>
+          <a:p>
+            <a:pPr marL="571500" indent="-571500">
+              <a:buFont typeface="Arial" panose="020B0604020202020204" pitchFamily="34" charset="0"/>
+              <a:buChar char="•"/>
+            </a:pPr>
+            <a:r>
+              <a:rPr lang="en-US" sz="4000" dirty="0">
+                <a:solidFill>
+                  <a:srgbClr val="CF3338"/>
+                </a:solidFill>
+              </a:rPr>
+              <a:t>Solution: log work in-file </a:t>
+            </a:r>
+          </a:p>
+          <a:p>
+            <a:r>
+              <a:rPr lang="en-US" sz="4000" b="1" dirty="0">
+                <a:solidFill>
+                  <a:srgbClr val="CF3338"/>
+                </a:solidFill>
+              </a:rPr>
+              <a:t>3 prompts</a:t>
+            </a:r>
+            <a:endParaRPr lang="en-US" sz="4000" dirty="0">
+              <a:solidFill>
+                <a:srgbClr val="CF3338"/>
+              </a:solidFill>
+            </a:endParaRPr>
+          </a:p>
+          <a:p>
+            <a:pPr marL="571500" indent="-571500">
+              <a:buFont typeface="Arial" panose="020B0604020202020204" pitchFamily="34" charset="0"/>
+              <a:buChar char="•"/>
+            </a:pPr>
+            <a:r>
+              <a:rPr lang="en-US" sz="4000" dirty="0">
+                <a:solidFill>
+                  <a:srgbClr val="CF3338"/>
+                </a:solidFill>
+              </a:rPr>
+              <a:t>Setup log (once) </a:t>
+            </a:r>
+          </a:p>
+          <a:p>
+            <a:pPr marL="571500" indent="-571500">
+              <a:buFont typeface="Arial" panose="020B0604020202020204" pitchFamily="34" charset="0"/>
+              <a:buChar char="•"/>
+            </a:pPr>
+            <a:r>
+              <a:rPr lang="en-US" sz="4000" dirty="0">
+                <a:solidFill>
+                  <a:srgbClr val="CF3338"/>
+                </a:solidFill>
+              </a:rPr>
+              <a:t>Do task + log it </a:t>
+            </a:r>
+          </a:p>
+          <a:p>
+            <a:pPr marL="571500" indent="-571500">
+              <a:buFont typeface="Arial" panose="020B0604020202020204" pitchFamily="34" charset="0"/>
+              <a:buChar char="•"/>
+            </a:pPr>
+            <a:r>
+              <a:rPr lang="en-US" sz="4000" dirty="0">
+                <a:solidFill>
+                  <a:srgbClr val="CF3338"/>
+                </a:solidFill>
+              </a:rPr>
+              <a:t>Reopen: read log + resume </a:t>
+            </a:r>
+          </a:p>
+          <a:p>
+            <a:r>
+              <a:rPr lang="en-US" sz="4000" b="1" dirty="0">
+                <a:solidFill>
+                  <a:srgbClr val="CF3338"/>
+                </a:solidFill>
+              </a:rPr>
+              <a:t>Demo</a:t>
+            </a:r>
+            <a:endParaRPr lang="en-US" sz="4000" dirty="0">
+              <a:solidFill>
+                <a:srgbClr val="CF3338"/>
+              </a:solidFill>
+            </a:endParaRPr>
+          </a:p>
+          <a:p>
+            <a:pPr marL="571500" indent="-571500">
+              <a:buFont typeface="Arial" panose="020B0604020202020204" pitchFamily="34" charset="0"/>
+              <a:buChar char="•"/>
+            </a:pPr>
+            <a:r>
+              <a:rPr lang="en-US" sz="4000" dirty="0">
+                <a:solidFill>
+                  <a:srgbClr val="CF3338"/>
+                </a:solidFill>
+              </a:rPr>
+              <a:t>Add Profit + Margin → close → reopen </a:t>
+            </a:r>
+          </a:p>
+          <a:p>
+            <a:r>
+              <a:rPr lang="en-US" sz="4000" b="1" dirty="0">
+                <a:solidFill>
+                  <a:srgbClr val="CF3338"/>
+                </a:solidFill>
+              </a:rPr>
+              <a:t>Takeaway</a:t>
+            </a:r>
+            <a:endParaRPr lang="en-US" sz="4000" dirty="0">
+              <a:solidFill>
+                <a:srgbClr val="CF3338"/>
+              </a:solidFill>
+            </a:endParaRPr>
+          </a:p>
+          <a:p>
+            <a:pPr marL="571500" indent="-571500">
+              <a:buFont typeface="Arial" panose="020B0604020202020204" pitchFamily="34" charset="0"/>
+              <a:buChar char="•"/>
+            </a:pPr>
+            <a:r>
+              <a:rPr lang="en-US" sz="4000" dirty="0">
+                <a:solidFill>
+                  <a:srgbClr val="CF3338"/>
+                </a:solidFill>
+              </a:rPr>
+              <a:t>In-file log = persistent, reviewable </a:t>
+            </a:r>
+          </a:p>
+        </p:txBody>
+      </p:sp>
+    </p:spTree>
+  </p:cSld>
+  <p:clrMapOvr>
+    <a:masterClrMapping/>
+  </p:clrMapOvr>
+</p:sld>
+</file>
+
+<file path=ppt/slides/slide8.xml><?xml version="1.0" encoding="utf-8"?>
 <p:sld xmlns:a="http://schemas.openxmlformats.org/drawingml/2006/main" xmlns:r="http://schemas.openxmlformats.org/officeDocument/2006/relationships" xmlns:p="http://schemas.openxmlformats.org/presentationml/2006/main">
   <p:cSld>
     <p:spTree>
@@ -6439,7 +6596,7 @@
 </p:sld>
 </file>
 
-<file path=ppt/slides/slide6.xml><?xml version="1.0" encoding="utf-8"?>
+<file path=ppt/slides/slide9.xml><?xml version="1.0" encoding="utf-8"?>
 <p:sld xmlns:a="http://schemas.openxmlformats.org/drawingml/2006/main" xmlns:r="http://schemas.openxmlformats.org/officeDocument/2006/relationships" xmlns:p="http://schemas.openxmlformats.org/presentationml/2006/main">
   <p:cSld>
     <p:spTree>
@@ -6642,566 +6799,6 @@
         <p14:creationId xmlns:p14="http://schemas.microsoft.com/office/powerpoint/2010/main" val="2946292221"/>
       </p:ext>
     </p:extLst>
-  </p:cSld>
-  <p:clrMapOvr>
-    <a:masterClrMapping/>
-  </p:clrMapOvr>
-</p:sld>
-</file>
-
-<file path=ppt/slides/slide7.xml><?xml version="1.0" encoding="utf-8"?>
-<p:sld xmlns:a="http://schemas.openxmlformats.org/drawingml/2006/main" xmlns:r="http://schemas.openxmlformats.org/officeDocument/2006/relationships" xmlns:p="http://schemas.openxmlformats.org/presentationml/2006/main">
-  <p:cSld>
-    <p:spTree>
-      <p:nvGrpSpPr>
-        <p:cNvPr id="1" name=""/>
-        <p:cNvGrpSpPr/>
-        <p:nvPr/>
-      </p:nvGrpSpPr>
-      <p:grpSpPr>
-        <a:xfrm>
-          <a:off x="0" y="0"/>
-          <a:ext cx="0" cy="0"/>
-          <a:chOff x="0" y="0"/>
-          <a:chExt cx="0" cy="0"/>
-        </a:xfrm>
-      </p:grpSpPr>
-      <p:pic>
-        <p:nvPicPr>
-          <p:cNvPr id="10" name="Picture 9"/>
-          <p:cNvPicPr>
-            <a:picLocks noChangeAspect="1"/>
-          </p:cNvPicPr>
-          <p:nvPr/>
-        </p:nvPicPr>
-        <p:blipFill rotWithShape="1">
-          <a:blip r:embed="rId2">
-            <a:extLst>
-              <a:ext uri="{28A0092B-C50C-407E-A947-70E740481C1C}">
-                <a14:useLocalDpi xmlns:a14="http://schemas.microsoft.com/office/drawing/2010/main" val="0"/>
-              </a:ext>
-            </a:extLst>
-          </a:blip>
-          <a:srcRect l="50728" t="56371"/>
-          <a:stretch/>
-        </p:blipFill>
-        <p:spPr>
-          <a:xfrm>
-            <a:off x="12204691" y="3316148"/>
-            <a:ext cx="6083309" cy="6970854"/>
-          </a:xfrm>
-          <a:prstGeom prst="rect">
-            <a:avLst/>
-          </a:prstGeom>
-        </p:spPr>
-      </p:pic>
-      <p:pic>
-        <p:nvPicPr>
-          <p:cNvPr id="4" name="Picture 3"/>
-          <p:cNvPicPr>
-            <a:picLocks noChangeAspect="1"/>
-          </p:cNvPicPr>
-          <p:nvPr/>
-        </p:nvPicPr>
-        <p:blipFill>
-          <a:blip r:embed="rId3">
-            <a:extLst>
-              <a:ext uri="{28A0092B-C50C-407E-A947-70E740481C1C}">
-                <a14:useLocalDpi xmlns:a14="http://schemas.microsoft.com/office/drawing/2010/main" val="0"/>
-              </a:ext>
-            </a:extLst>
-          </a:blip>
-          <a:stretch>
-            <a:fillRect/>
-          </a:stretch>
-        </p:blipFill>
-        <p:spPr>
-          <a:xfrm>
-            <a:off x="-807744" y="-3724155"/>
-            <a:ext cx="15257208" cy="11189825"/>
-          </a:xfrm>
-          <a:prstGeom prst="rect">
-            <a:avLst/>
-          </a:prstGeom>
-        </p:spPr>
-      </p:pic>
-      <p:sp>
-        <p:nvSpPr>
-          <p:cNvPr id="11" name="TextBox 10"/>
-          <p:cNvSpPr txBox="1"/>
-          <p:nvPr/>
-        </p:nvSpPr>
-        <p:spPr>
-          <a:xfrm>
-            <a:off x="486137" y="2531318"/>
-            <a:ext cx="11979797" cy="923330"/>
-          </a:xfrm>
-          <a:prstGeom prst="rect">
-            <a:avLst/>
-          </a:prstGeom>
-          <a:noFill/>
-        </p:spPr>
-        <p:txBody>
-          <a:bodyPr wrap="square" rtlCol="0">
-            <a:spAutoFit/>
-          </a:bodyPr>
-          <a:lstStyle/>
-          <a:p>
-            <a:r>
-              <a:rPr lang="en-US" sz="5400" b="1" dirty="0">
-                <a:solidFill>
-                  <a:srgbClr val="CF3338"/>
-                </a:solidFill>
-                <a:latin typeface="Pragmatica" panose="020B0403040502020204" pitchFamily="34" charset="0"/>
-              </a:rPr>
-              <a:t>Questions?</a:t>
-            </a:r>
-          </a:p>
-        </p:txBody>
-      </p:sp>
-      <p:pic>
-        <p:nvPicPr>
-          <p:cNvPr id="5" name="Picture 4">
-            <a:extLst>
-              <a:ext uri="{FF2B5EF4-FFF2-40B4-BE49-F238E27FC236}">
-                <a16:creationId xmlns:a16="http://schemas.microsoft.com/office/drawing/2014/main" id="{54A06221-5316-4BCF-9FDA-BDB95FF4A778}"/>
-              </a:ext>
-            </a:extLst>
-          </p:cNvPr>
-          <p:cNvPicPr>
-            <a:picLocks noChangeAspect="1"/>
-          </p:cNvPicPr>
-          <p:nvPr/>
-        </p:nvPicPr>
-        <p:blipFill>
-          <a:blip r:embed="rId4">
-            <a:extLst>
-              <a:ext uri="{28A0092B-C50C-407E-A947-70E740481C1C}">
-                <a14:useLocalDpi xmlns:a14="http://schemas.microsoft.com/office/drawing/2010/main" val="0"/>
-              </a:ext>
-            </a:extLst>
-          </a:blip>
-          <a:srcRect/>
-          <a:stretch/>
-        </p:blipFill>
-        <p:spPr>
-          <a:xfrm>
-            <a:off x="12204691" y="3317239"/>
-            <a:ext cx="6083309" cy="6968672"/>
-          </a:xfrm>
-          <a:prstGeom prst="rect">
-            <a:avLst/>
-          </a:prstGeom>
-        </p:spPr>
-      </p:pic>
-    </p:spTree>
-    <p:extLst>
-      <p:ext uri="{BB962C8B-B14F-4D97-AF65-F5344CB8AC3E}">
-        <p14:creationId xmlns:p14="http://schemas.microsoft.com/office/powerpoint/2010/main" val="1689860732"/>
-      </p:ext>
-    </p:extLst>
-  </p:cSld>
-  <p:clrMapOvr>
-    <a:masterClrMapping/>
-  </p:clrMapOvr>
-</p:sld>
-</file>
-
-<file path=ppt/slides/slide8.xml><?xml version="1.0" encoding="utf-8"?>
-<p:sld xmlns:a="http://schemas.openxmlformats.org/drawingml/2006/main" xmlns:r="http://schemas.openxmlformats.org/officeDocument/2006/relationships" xmlns:p="http://schemas.openxmlformats.org/presentationml/2006/main">
-  <p:cSld>
-    <p:spTree>
-      <p:nvGrpSpPr>
-        <p:cNvPr id="1" name="">
-          <a:extLst>
-            <a:ext uri="{FF2B5EF4-FFF2-40B4-BE49-F238E27FC236}">
-              <a16:creationId xmlns:a16="http://schemas.microsoft.com/office/drawing/2014/main" id="{2501CF9C-FC7D-DEAE-2D87-10577021DCAD}"/>
-            </a:ext>
-          </a:extLst>
-        </p:cNvPr>
-        <p:cNvGrpSpPr/>
-        <p:nvPr/>
-      </p:nvGrpSpPr>
-      <p:grpSpPr>
-        <a:xfrm>
-          <a:off x="0" y="0"/>
-          <a:ext cx="0" cy="0"/>
-          <a:chOff x="0" y="0"/>
-          <a:chExt cx="0" cy="0"/>
-        </a:xfrm>
-      </p:grpSpPr>
-      <p:pic>
-        <p:nvPicPr>
-          <p:cNvPr id="10" name="Picture 9">
-            <a:extLst>
-              <a:ext uri="{FF2B5EF4-FFF2-40B4-BE49-F238E27FC236}">
-                <a16:creationId xmlns:a16="http://schemas.microsoft.com/office/drawing/2014/main" id="{56CBD8B9-A494-A7F7-0F64-845B951EC99F}"/>
-              </a:ext>
-            </a:extLst>
-          </p:cNvPr>
-          <p:cNvPicPr>
-            <a:picLocks noChangeAspect="1"/>
-          </p:cNvPicPr>
-          <p:nvPr/>
-        </p:nvPicPr>
-        <p:blipFill>
-          <a:blip r:embed="rId2">
-            <a:extLst>
-              <a:ext uri="{28A0092B-C50C-407E-A947-70E740481C1C}">
-                <a14:useLocalDpi xmlns:a14="http://schemas.microsoft.com/office/drawing/2010/main" val="0"/>
-              </a:ext>
-            </a:extLst>
-          </a:blip>
-          <a:srcRect/>
-          <a:stretch/>
-        </p:blipFill>
-        <p:spPr>
-          <a:xfrm>
-            <a:off x="13542796" y="4850092"/>
-            <a:ext cx="4745204" cy="5435819"/>
-          </a:xfrm>
-          <a:prstGeom prst="rect">
-            <a:avLst/>
-          </a:prstGeom>
-        </p:spPr>
-      </p:pic>
-      <p:pic>
-        <p:nvPicPr>
-          <p:cNvPr id="4" name="Picture 3">
-            <a:extLst>
-              <a:ext uri="{FF2B5EF4-FFF2-40B4-BE49-F238E27FC236}">
-                <a16:creationId xmlns:a16="http://schemas.microsoft.com/office/drawing/2014/main" id="{AC63943A-3FAF-22B6-228E-4092BA65ACAF}"/>
-              </a:ext>
-            </a:extLst>
-          </p:cNvPr>
-          <p:cNvPicPr>
-            <a:picLocks noChangeAspect="1"/>
-          </p:cNvPicPr>
-          <p:nvPr/>
-        </p:nvPicPr>
-        <p:blipFill>
-          <a:blip r:embed="rId3">
-            <a:extLst>
-              <a:ext uri="{28A0092B-C50C-407E-A947-70E740481C1C}">
-                <a14:useLocalDpi xmlns:a14="http://schemas.microsoft.com/office/drawing/2010/main" val="0"/>
-              </a:ext>
-            </a:extLst>
-          </a:blip>
-          <a:stretch>
-            <a:fillRect/>
-          </a:stretch>
-        </p:blipFill>
-        <p:spPr>
-          <a:xfrm>
-            <a:off x="-914400" y="-3440159"/>
-            <a:ext cx="15257208" cy="11189825"/>
-          </a:xfrm>
-          <a:prstGeom prst="rect">
-            <a:avLst/>
-          </a:prstGeom>
-        </p:spPr>
-      </p:pic>
-      <p:sp>
-        <p:nvSpPr>
-          <p:cNvPr id="11" name="TextBox 10">
-            <a:extLst>
-              <a:ext uri="{FF2B5EF4-FFF2-40B4-BE49-F238E27FC236}">
-                <a16:creationId xmlns:a16="http://schemas.microsoft.com/office/drawing/2014/main" id="{5DFCEBB5-9C7D-6182-700C-0428AD2DDE67}"/>
-              </a:ext>
-            </a:extLst>
-          </p:cNvPr>
-          <p:cNvSpPr txBox="1"/>
-          <p:nvPr/>
-        </p:nvSpPr>
-        <p:spPr>
-          <a:xfrm>
-            <a:off x="486137" y="2531318"/>
-            <a:ext cx="11979797" cy="923330"/>
-          </a:xfrm>
-          <a:prstGeom prst="rect">
-            <a:avLst/>
-          </a:prstGeom>
-          <a:noFill/>
-        </p:spPr>
-        <p:txBody>
-          <a:bodyPr wrap="square" rtlCol="0">
-            <a:spAutoFit/>
-          </a:bodyPr>
-          <a:lstStyle/>
-          <a:p>
-            <a:r>
-              <a:rPr lang="en-US" sz="5400" b="1" dirty="0">
-                <a:solidFill>
-                  <a:srgbClr val="CF3338"/>
-                </a:solidFill>
-                <a:latin typeface="Pragmatica" panose="020B0403040502020204" pitchFamily="34" charset="0"/>
-              </a:rPr>
-              <a:t>THANK YOU</a:t>
-            </a:r>
-          </a:p>
-        </p:txBody>
-      </p:sp>
-      <p:sp>
-        <p:nvSpPr>
-          <p:cNvPr id="2" name="AutoShape 2" descr="Home | Full Stack Modeller">
-            <a:extLst>
-              <a:ext uri="{FF2B5EF4-FFF2-40B4-BE49-F238E27FC236}">
-                <a16:creationId xmlns:a16="http://schemas.microsoft.com/office/drawing/2014/main" id="{16E5F1F1-B220-BEC5-B5EA-499D4942916C}"/>
-              </a:ext>
-            </a:extLst>
-          </p:cNvPr>
-          <p:cNvSpPr>
-            <a:spLocks noChangeAspect="1" noChangeArrowheads="1"/>
-          </p:cNvSpPr>
-          <p:nvPr/>
-        </p:nvSpPr>
-        <p:spPr bwMode="auto">
-          <a:xfrm>
-            <a:off x="8991600" y="4991100"/>
-            <a:ext cx="304800" cy="304800"/>
-          </a:xfrm>
-          <a:prstGeom prst="rect">
-            <a:avLst/>
-          </a:prstGeom>
-          <a:noFill/>
-          <a:extLst>
-            <a:ext uri="{909E8E84-426E-40DD-AFC4-6F175D3DCCD1}">
-              <a14:hiddenFill xmlns:a14="http://schemas.microsoft.com/office/drawing/2010/main">
-                <a:solidFill>
-                  <a:srgbClr val="FFFFFF"/>
-                </a:solidFill>
-              </a14:hiddenFill>
-            </a:ext>
-          </a:extLst>
-        </p:spPr>
-        <p:txBody>
-          <a:bodyPr vert="horz" wrap="square" lIns="91440" tIns="45720" rIns="91440" bIns="45720" numCol="1" anchor="t" anchorCtr="0" compatLnSpc="1">
-            <a:prstTxWarp prst="textNoShape">
-              <a:avLst/>
-            </a:prstTxWarp>
-          </a:bodyPr>
-          <a:lstStyle/>
-          <a:p>
-            <a:endParaRPr lang="en-US"/>
-          </a:p>
-        </p:txBody>
-      </p:sp>
-    </p:spTree>
-    <p:extLst>
-      <p:ext uri="{BB962C8B-B14F-4D97-AF65-F5344CB8AC3E}">
-        <p14:creationId xmlns:p14="http://schemas.microsoft.com/office/powerpoint/2010/main" val="709344641"/>
-      </p:ext>
-    </p:extLst>
-  </p:cSld>
-  <p:clrMapOvr>
-    <a:masterClrMapping/>
-  </p:clrMapOvr>
-</p:sld>
-</file>
-
-<file path=ppt/slides/slide9.xml><?xml version="1.0" encoding="utf-8"?>
-<p:sld xmlns:a="http://schemas.openxmlformats.org/drawingml/2006/main" xmlns:p="http://schemas.openxmlformats.org/presentationml/2006/main" xmlns:r="http://schemas.openxmlformats.org/officeDocument/2006/relationships">
-  <p:cSld>
-    <p:spTree>
-      <p:nvGrpSpPr>
-        <p:cNvPr id="1" name=""/>
-        <p:cNvGrpSpPr/>
-        <p:nvPr/>
-      </p:nvGrpSpPr>
-      <p:grpSpPr/>
-      <p:sp>
-        <p:nvSpPr>
-          <p:cNvPr id="11" name="TextBox 10">
-            <a:extLst>
-              <a:ext uri="{FF2B5EF4-FFF2-40B4-BE49-F238E27FC236}">
-                <a16:creationId xmlns:a16="http://schemas.microsoft.com/office/drawing/2014/main" id="{781603C7-76CD-A76B-F955-68F3329D8967}"/>
-              </a:ext>
-            </a:extLst>
-          </p:cNvPr>
-          <p:cNvSpPr txBox="1"/>
-          <p:nvPr/>
-        </p:nvSpPr>
-        <p:spPr>
-          <a:xfrm>
-            <a:off x="520861" y="170082"/>
-            <a:ext cx="14642939" cy="2100000"/>
-          </a:xfrm>
-          <a:prstGeom prst="rect">
-            <a:avLst/>
-          </a:prstGeom>
-          <a:noFill/>
-        </p:spPr>
-        <p:txBody>
-          <a:bodyPr wrap="square" rtlCol="0">
-            <a:spAutoFit/>
-          </a:bodyPr>
-          <a:lstStyle/>
-          <a:p>
-            <a:r>
-              <a:rPr lang="en-US" sz="4400" dirty="0">
-                <a:latin typeface="Aliens &amp; cows" panose="00000500000000000000" pitchFamily="2" charset="0"/>
-              </a:rPr>
-              <a:t>What Copilot in Excel does today</a:t>
-            </a:r>
-          </a:p>
-        </p:txBody>
-      </p:sp>
-      <p:sp>
-        <p:nvSpPr>
-          <p:cNvPr id="3" name="TextBox 2">
-            <a:extLst>
-              <a:ext uri="{FF2B5EF4-FFF2-40B4-BE49-F238E27FC236}">
-                <a16:creationId xmlns:a16="http://schemas.microsoft.com/office/drawing/2014/main" id="{5F84214C-EACA-355D-FAEB-44DBEAE3040B}"/>
-              </a:ext>
-            </a:extLst>
-          </p:cNvPr>
-          <p:cNvSpPr txBox="1"/>
-          <p:nvPr/>
-        </p:nvSpPr>
-        <p:spPr>
-          <a:xfrm>
-            <a:off x="520861" y="2350000"/>
-            <a:ext cx="14393120" cy="7300000"/>
-          </a:xfrm>
-          <a:prstGeom prst="rect">
-            <a:avLst/>
-          </a:prstGeom>
-          <a:noFill/>
-        </p:spPr>
-        <p:txBody>
-          <a:bodyPr wrap="square" rtlCol="0">
-            <a:spAutoFit/>
-          </a:bodyPr>
-          <a:lstStyle/>
-          <a:p>
-            <a:pPr marL="685800" indent="-685800">
-              <a:buClr>
-                <a:srgbClr val="CF3338"/>
-              </a:buClr>
-              <a:buFont typeface="Arial" panose="020B0604020202020204" pitchFamily="34" charset="0"/>
-              <a:buChar char="•"/>
-            </a:pPr>
-            <a:r>
-              <a:rPr lang="en-US" sz="2800" dirty="0">
-                <a:solidFill>
-                  <a:srgbClr val="707070"/>
-                </a:solidFill>
-                <a:latin typeface="Pragmatica" panose="020B0403040502020204" pitchFamily="34" charset="0"/>
-              </a:rPr>
-              <a:t>Copilot is now the single AI surface inside Excel</a:t>
-            </a:r>
-          </a:p>
-          <a:p>
-            <a:pPr marL="685800" indent="-685800">
-              <a:buClr>
-                <a:srgbClr val="CF3338"/>
-              </a:buClr>
-              <a:buFont typeface="Arial" panose="020B0604020202020204" pitchFamily="34" charset="0"/>
-              <a:buChar char="•"/>
-            </a:pPr>
-            <a:r>
-              <a:rPr lang="en-US" sz="2800" dirty="0">
-                <a:solidFill>
-                  <a:srgbClr val="707070"/>
-                </a:solidFill>
-                <a:latin typeface="Pragmatica" panose="020B0403040502020204" pitchFamily="34" charset="0"/>
-              </a:rPr>
-              <a:t>Advanced Analysis with Python has been folded back into Copilot</a:t>
-            </a:r>
-          </a:p>
-          <a:p>
-            <a:pPr marL="685800" indent="-685800">
-              <a:buClr>
-                <a:srgbClr val="CF3338"/>
-              </a:buClr>
-              <a:buFont typeface="Arial" panose="020B0604020202020204" pitchFamily="34" charset="0"/>
-              <a:buChar char="•"/>
-            </a:pPr>
-            <a:r>
-              <a:rPr lang="en-US" sz="2800" dirty="0">
-                <a:solidFill>
-                  <a:srgbClr val="707070"/>
-                </a:solidFill>
-                <a:latin typeface="Pragmatica" panose="020B0403040502020204" pitchFamily="34" charset="0"/>
-              </a:rPr>
-              <a:t>Agent Mode's multi-step build features now run inside regular Copilot</a:t>
-            </a:r>
-          </a:p>
-          <a:p>
-            <a:pPr marL="685800" indent="-685800">
-              <a:buClr>
-                <a:srgbClr val="CF3338"/>
-              </a:buClr>
-              <a:buFont typeface="Arial" panose="020B0604020202020204" pitchFamily="34" charset="0"/>
-              <a:buChar char="•"/>
-            </a:pPr>
-            <a:r>
-              <a:rPr lang="en-US" sz="2800" dirty="0">
-                <a:solidFill>
-                  <a:srgbClr val="707070"/>
-                </a:solidFill>
-                <a:latin typeface="Pragmatica" panose="020B0403040502020204" pitchFamily="34" charset="0"/>
-              </a:rPr>
-              <a:t>One pane, one subscription, broader reach across your workbook</a:t>
-            </a:r>
-          </a:p>
-          <a:p>
-            <a:pPr marL="685800" indent="-685800">
-              <a:buClr>
-                <a:srgbClr val="CF3338"/>
-              </a:buClr>
-              <a:buFont typeface="Arial" panose="020B0604020202020204" pitchFamily="34" charset="0"/>
-              <a:buChar char="•"/>
-            </a:pPr>
-            <a:r>
-              <a:rPr lang="en-US" sz="2800" dirty="0">
-                <a:solidFill>
-                  <a:srgbClr val="707070"/>
-                </a:solidFill>
-                <a:latin typeface="Pragmatica" panose="020B0403040502020204" pitchFamily="34" charset="0"/>
-              </a:rPr>
-              <a:t>Our job today: use it with confidence, not just convenience</a:t>
-            </a:r>
-          </a:p>
-        </p:txBody>
-      </p:sp>
-      <p:pic>
-        <p:nvPicPr>
-          <p:cNvPr id="15" name="Picture 14" descr="A close up of a sign  Description automatically generated">
-            <a:extLst>
-              <a:ext uri="{FF2B5EF4-FFF2-40B4-BE49-F238E27FC236}">
-                <a16:creationId xmlns:a16="http://schemas.microsoft.com/office/drawing/2014/main" id="{6959BD9D-5738-BA78-737D-3115164D42C1}"/>
-              </a:ext>
-            </a:extLst>
-          </p:cNvPr>
-          <p:cNvPicPr>
-            <a:picLocks noChangeAspect="1"/>
-          </p:cNvPicPr>
-          <p:nvPr/>
-        </p:nvPicPr>
-        <p:blipFill>
-          <a:blip r:embed="rId2">
-            <a:extLst>
-              <a:ext uri="{28A0092B-C50C-407E-A947-70E740481C1C}">
-                <a14:useLocalDpi xmlns:a14="http://schemas.microsoft.com/office/drawing/2010/main" val="0"/>
-              </a:ext>
-            </a:extLst>
-          </a:blip>
-          <a:stretch>
-            <a:fillRect/>
-          </a:stretch>
-        </p:blipFill>
-        <p:spPr>
-          <a:xfrm>
-            <a:off x="16341036" y="8058429"/>
-            <a:ext cx="1942857" cy="2228571"/>
-          </a:xfrm>
-          <a:prstGeom prst="rect">
-            <a:avLst/>
-          </a:prstGeom>
-        </p:spPr>
-      </p:pic>
-    </p:spTree>
   </p:cSld>
   <p:clrMapOvr>
     <a:masterClrMapping/>
